--- a/A1_Nivel_1/07_Rutina_Diaria/Sesion_07_Rutina_Diaria_v2.pptx
+++ b/A1_Nivel_1/07_Rutina_Diaria/Sesion_07_Rutina_Diaria_v2.pptx
@@ -5,7 +5,7 @@
     <p:sldMasterId id="2147483648" r:id="rId1"/>
   </p:sldMasterIdLst>
   <p:notesMasterIdLst>
-    <p:notesMasterId r:id="rId36"/>
+    <p:notesMasterId r:id="rId38"/>
   </p:notesMasterIdLst>
   <p:sldIdLst>
     <p:sldId id="256" r:id="rId2"/>
@@ -29,19 +29,21 @@
     <p:sldId id="265" r:id="rId20"/>
     <p:sldId id="268" r:id="rId21"/>
     <p:sldId id="269" r:id="rId22"/>
-    <p:sldId id="270" r:id="rId23"/>
-    <p:sldId id="271" r:id="rId24"/>
-    <p:sldId id="272" r:id="rId25"/>
-    <p:sldId id="273" r:id="rId26"/>
-    <p:sldId id="274" r:id="rId27"/>
-    <p:sldId id="275" r:id="rId28"/>
-    <p:sldId id="276" r:id="rId29"/>
-    <p:sldId id="277" r:id="rId30"/>
-    <p:sldId id="278" r:id="rId31"/>
-    <p:sldId id="279" r:id="rId32"/>
-    <p:sldId id="266" r:id="rId33"/>
-    <p:sldId id="286" r:id="rId34"/>
-    <p:sldId id="267" r:id="rId35"/>
+    <p:sldId id="290" r:id="rId23"/>
+    <p:sldId id="270" r:id="rId24"/>
+    <p:sldId id="271" r:id="rId25"/>
+    <p:sldId id="272" r:id="rId26"/>
+    <p:sldId id="273" r:id="rId27"/>
+    <p:sldId id="274" r:id="rId28"/>
+    <p:sldId id="275" r:id="rId29"/>
+    <p:sldId id="276" r:id="rId30"/>
+    <p:sldId id="291" r:id="rId31"/>
+    <p:sldId id="277" r:id="rId32"/>
+    <p:sldId id="278" r:id="rId33"/>
+    <p:sldId id="279" r:id="rId34"/>
+    <p:sldId id="266" r:id="rId35"/>
+    <p:sldId id="286" r:id="rId36"/>
+    <p:sldId id="267" r:id="rId37"/>
   </p:sldIdLst>
   <p:sldSz cx="12192000" cy="6858000"/>
   <p:notesSz cx="6858000" cy="12192000"/>
@@ -503,7 +505,7 @@
           <a:p>
             <a:fld id="{F7021451-1387-4CA6-816F-3879F97B5CBC}" type="slidenum">
               <a:rPr lang="en-US"/>
-              <a:t>32</a:t>
+              <a:t>34</a:t>
             </a:fld>
             <a:endParaRPr lang="en-US"/>
           </a:p>
@@ -587,7 +589,7 @@
           <a:p>
             <a:fld id="{F7021451-1387-4CA6-816F-3879F97B5CBC}" type="slidenum">
               <a:rPr lang="en-US"/>
-              <a:t>34</a:t>
+              <a:t>36</a:t>
             </a:fld>
             <a:endParaRPr lang="en-US"/>
           </a:p>
@@ -7034,6 +7036,169 @@
           </a:prstGeom>
         </p:spPr>
       </p:pic>
+      <p:sp>
+        <p:nvSpPr>
+          <p:cNvPr id="3" name="TextBox 2">
+            <a:extLst>
+              <a:ext uri="{FF2B5EF4-FFF2-40B4-BE49-F238E27FC236}">
+                <a16:creationId xmlns:a16="http://schemas.microsoft.com/office/drawing/2014/main" id="{226E7101-1BCF-5658-EC7F-821CEBC04BE3}"/>
+              </a:ext>
+            </a:extLst>
+          </p:cNvPr>
+          <p:cNvSpPr txBox="1"/>
+          <p:nvPr/>
+        </p:nvSpPr>
+        <p:spPr>
+          <a:xfrm>
+            <a:off x="5631180" y="1539240"/>
+            <a:ext cx="4442460" cy="2308324"/>
+          </a:xfrm>
+          <a:prstGeom prst="rect">
+            <a:avLst/>
+          </a:prstGeom>
+          <a:noFill/>
+        </p:spPr>
+        <p:txBody>
+          <a:bodyPr wrap="square" rtlCol="0">
+            <a:spAutoFit/>
+          </a:bodyPr>
+          <a:lstStyle/>
+          <a:p>
+            <a:r>
+              <a:rPr lang="ko-KR" altLang="es-CL" dirty="0"/>
+              <a:t>엄마</a:t>
+            </a:r>
+            <a:r>
+              <a:rPr lang="ko-KR" altLang="es-CL" dirty="0">
+                <a:highlight>
+                  <a:srgbClr val="FFFF00"/>
+                </a:highlight>
+              </a:rPr>
+              <a:t>하고</a:t>
+            </a:r>
+            <a:r>
+              <a:rPr lang="ko-KR" altLang="es-CL" dirty="0"/>
+              <a:t> </a:t>
+            </a:r>
+            <a:r>
+              <a:rPr lang="ko-KR" altLang="es-CL" dirty="0">
+                <a:highlight>
+                  <a:srgbClr val="FFFF00"/>
+                </a:highlight>
+              </a:rPr>
+              <a:t>같이</a:t>
+            </a:r>
+            <a:r>
+              <a:rPr lang="es-CL" altLang="ko-KR" dirty="0">
+                <a:highlight>
+                  <a:srgbClr val="FFFF00"/>
+                </a:highlight>
+              </a:rPr>
+              <a:t>/</a:t>
+            </a:r>
+            <a:r>
+              <a:rPr lang="ko-KR" altLang="es-CL" dirty="0">
+                <a:highlight>
+                  <a:srgbClr val="FFFF00"/>
+                </a:highlight>
+              </a:rPr>
+              <a:t>함께</a:t>
+            </a:r>
+            <a:r>
+              <a:rPr lang="ko-KR" altLang="es-CL" dirty="0"/>
+              <a:t> 밥 먹어요</a:t>
+            </a:r>
+            <a:endParaRPr lang="es-CL" altLang="ko-KR" dirty="0"/>
+          </a:p>
+          <a:p>
+            <a:r>
+              <a:rPr lang="es-CL" dirty="0"/>
+              <a:t>Mama(junto con) arroz como</a:t>
+            </a:r>
+          </a:p>
+          <a:p>
+            <a:r>
+              <a:rPr lang="ko-KR" altLang="es-CL" dirty="0"/>
+              <a:t>친구</a:t>
+            </a:r>
+            <a:r>
+              <a:rPr lang="ko-KR" altLang="es-CL" dirty="0">
+                <a:highlight>
+                  <a:srgbClr val="FFFF00"/>
+                </a:highlight>
+              </a:rPr>
+              <a:t>와</a:t>
+            </a:r>
+            <a:r>
+              <a:rPr lang="ko-KR" altLang="es-CL" dirty="0"/>
+              <a:t> </a:t>
+            </a:r>
+            <a:r>
+              <a:rPr lang="ko-KR" altLang="es-CL" dirty="0">
+                <a:highlight>
+                  <a:srgbClr val="FFFF00"/>
+                </a:highlight>
+              </a:rPr>
+              <a:t>같이</a:t>
+            </a:r>
+            <a:r>
+              <a:rPr lang="ko-KR" altLang="es-CL" dirty="0"/>
+              <a:t> 공부해요</a:t>
+            </a:r>
+            <a:endParaRPr lang="es-CL" altLang="ko-KR" dirty="0"/>
+          </a:p>
+          <a:p>
+            <a:r>
+              <a:rPr lang="es-CL" dirty="0"/>
+              <a:t>Amigo(junto con) estudiar</a:t>
+            </a:r>
+          </a:p>
+          <a:p>
+            <a:r>
+              <a:rPr lang="ko-KR" altLang="es-CL" dirty="0"/>
+              <a:t>선생님</a:t>
+            </a:r>
+            <a:r>
+              <a:rPr lang="ko-KR" altLang="es-CL" dirty="0">
+                <a:highlight>
+                  <a:srgbClr val="FFFF00"/>
+                </a:highlight>
+              </a:rPr>
+              <a:t>이랑</a:t>
+            </a:r>
+            <a:r>
+              <a:rPr lang="ko-KR" altLang="es-CL" dirty="0"/>
+              <a:t> </a:t>
+            </a:r>
+            <a:r>
+              <a:rPr lang="ko-KR" altLang="es-CL" dirty="0">
+                <a:highlight>
+                  <a:srgbClr val="FFFF00"/>
+                </a:highlight>
+              </a:rPr>
+              <a:t>함께</a:t>
+            </a:r>
+            <a:r>
+              <a:rPr lang="ko-KR" altLang="es-CL" dirty="0"/>
+              <a:t> 노래해요</a:t>
+            </a:r>
+            <a:br>
+              <a:rPr lang="es-CL" altLang="ko-KR" dirty="0"/>
+            </a:br>
+            <a:r>
+              <a:rPr lang="es-CL" altLang="ko-KR" dirty="0"/>
+              <a:t>Profesor(junto con) cantar</a:t>
+            </a:r>
+            <a:endParaRPr lang="es-CL" dirty="0"/>
+          </a:p>
+          <a:p>
+            <a:endParaRPr lang="es-CL" dirty="0"/>
+          </a:p>
+          <a:p>
+            <a:endParaRPr lang="es-CL" dirty="0"/>
+          </a:p>
+        </p:txBody>
+      </p:sp>
     </p:spTree>
     <p:extLst>
       <p:ext uri="{BB962C8B-B14F-4D97-AF65-F5344CB8AC3E}">
@@ -9155,6 +9320,178 @@
           </a:p>
         </p:txBody>
       </p:sp>
+      <p:sp>
+        <p:nvSpPr>
+          <p:cNvPr id="13" name="TextBox 12">
+            <a:extLst>
+              <a:ext uri="{FF2B5EF4-FFF2-40B4-BE49-F238E27FC236}">
+                <a16:creationId xmlns:a16="http://schemas.microsoft.com/office/drawing/2014/main" id="{C31112D4-06ED-3349-0D22-AD38B07851B2}"/>
+              </a:ext>
+            </a:extLst>
+          </p:cNvPr>
+          <p:cNvSpPr txBox="1"/>
+          <p:nvPr/>
+        </p:nvSpPr>
+        <p:spPr>
+          <a:xfrm>
+            <a:off x="4137713" y="2368094"/>
+            <a:ext cx="2887927" cy="3416320"/>
+          </a:xfrm>
+          <a:prstGeom prst="rect">
+            <a:avLst/>
+          </a:prstGeom>
+          <a:noFill/>
+        </p:spPr>
+        <p:txBody>
+          <a:bodyPr wrap="square" rtlCol="0">
+            <a:spAutoFit/>
+          </a:bodyPr>
+          <a:lstStyle/>
+          <a:p>
+            <a:r>
+              <a:rPr lang="ko-KR" altLang="es-CL" dirty="0"/>
+              <a:t>먹다</a:t>
+            </a:r>
+            <a:r>
+              <a:rPr lang="es-CL" altLang="ko-KR" dirty="0"/>
+              <a:t> -&gt; </a:t>
+            </a:r>
+            <a:r>
+              <a:rPr lang="ko-KR" altLang="es-CL" dirty="0"/>
+              <a:t>먹어요</a:t>
+            </a:r>
+            <a:endParaRPr lang="es-CL" altLang="ko-KR" dirty="0"/>
+          </a:p>
+          <a:p>
+            <a:r>
+              <a:rPr lang="ko-KR" altLang="es-CL" dirty="0"/>
+              <a:t>듣다 </a:t>
+            </a:r>
+            <a:r>
+              <a:rPr lang="es-CL" altLang="ko-KR" dirty="0"/>
+              <a:t>-&gt; </a:t>
+            </a:r>
+            <a:r>
+              <a:rPr lang="ko-KR" altLang="es-CL" dirty="0"/>
+              <a:t>들어요</a:t>
+            </a:r>
+            <a:endParaRPr lang="es-CL" altLang="ko-KR" dirty="0"/>
+          </a:p>
+          <a:p>
+            <a:r>
+              <a:rPr lang="ko-KR" altLang="es-CL" dirty="0"/>
+              <a:t>음악</a:t>
+            </a:r>
+            <a:r>
+              <a:rPr lang="ko-KR" altLang="es-CL" dirty="0">
+                <a:highlight>
+                  <a:srgbClr val="FFFF00"/>
+                </a:highlight>
+              </a:rPr>
+              <a:t>을</a:t>
+            </a:r>
+            <a:r>
+              <a:rPr lang="ko-KR" altLang="es-CL" dirty="0"/>
+              <a:t> 들어요</a:t>
+            </a:r>
+            <a:endParaRPr lang="es-CL" altLang="ko-KR" dirty="0"/>
+          </a:p>
+          <a:p>
+            <a:r>
+              <a:rPr lang="ko-KR" altLang="es-CL" dirty="0"/>
+              <a:t>듣어요</a:t>
+            </a:r>
+            <a:r>
+              <a:rPr lang="es-CL" altLang="ko-KR" dirty="0"/>
+              <a:t>(X)</a:t>
+            </a:r>
+          </a:p>
+          <a:p>
+            <a:r>
+              <a:rPr lang="ko-KR" altLang="es-CL" dirty="0"/>
+              <a:t>들어요</a:t>
+            </a:r>
+            <a:endParaRPr lang="es-CL" altLang="ko-KR" dirty="0"/>
+          </a:p>
+          <a:p>
+            <a:r>
+              <a:rPr lang="ko-KR" altLang="es-CL" dirty="0"/>
+              <a:t>걷다</a:t>
+            </a:r>
+            <a:r>
+              <a:rPr lang="es-CL" altLang="ko-KR" dirty="0"/>
+              <a:t>(caminar) -&gt; </a:t>
+            </a:r>
+            <a:r>
+              <a:rPr lang="ko-KR" altLang="es-CL" dirty="0"/>
+              <a:t>걸어요</a:t>
+            </a:r>
+            <a:endParaRPr lang="es-CL" altLang="ko-KR" dirty="0"/>
+          </a:p>
+          <a:p>
+            <a:r>
+              <a:rPr lang="ko-KR" altLang="es-CL" dirty="0"/>
+              <a:t>묻다</a:t>
+            </a:r>
+            <a:r>
+              <a:rPr lang="es-CL" altLang="ko-KR" dirty="0"/>
+              <a:t>(preguntar) -&gt; </a:t>
+            </a:r>
+            <a:r>
+              <a:rPr lang="ko-KR" altLang="es-CL" dirty="0"/>
+              <a:t>물어요</a:t>
+            </a:r>
+            <a:endParaRPr lang="es-CL" altLang="ko-KR" dirty="0"/>
+          </a:p>
+          <a:p>
+            <a:endParaRPr lang="es-CL" dirty="0"/>
+          </a:p>
+          <a:p>
+            <a:r>
+              <a:rPr lang="ko-KR" altLang="es-CL" dirty="0"/>
+              <a:t>받다</a:t>
+            </a:r>
+            <a:r>
+              <a:rPr lang="es-CL" altLang="ko-KR" dirty="0"/>
+              <a:t>(recibir) -&gt; </a:t>
+            </a:r>
+            <a:r>
+              <a:rPr lang="ko-KR" altLang="es-CL" dirty="0"/>
+              <a:t>받아요</a:t>
+            </a:r>
+            <a:endParaRPr lang="es-CL" altLang="ko-KR" dirty="0"/>
+          </a:p>
+          <a:p>
+            <a:r>
+              <a:rPr lang="ko-KR" altLang="es-CL" dirty="0"/>
+              <a:t>선물을 받아요</a:t>
+            </a:r>
+            <a:endParaRPr lang="es-CL" altLang="ko-KR" dirty="0"/>
+          </a:p>
+          <a:p>
+            <a:r>
+              <a:rPr lang="ko-KR" altLang="es-CL" dirty="0"/>
+              <a:t>닫다</a:t>
+            </a:r>
+            <a:r>
+              <a:rPr lang="es-CL" altLang="ko-KR" dirty="0"/>
+              <a:t>(cerrar) -&gt; </a:t>
+            </a:r>
+            <a:r>
+              <a:rPr lang="ko-KR" altLang="es-CL" dirty="0"/>
+              <a:t>닫아요</a:t>
+            </a:r>
+            <a:endParaRPr lang="es-CL" altLang="ko-KR" dirty="0"/>
+          </a:p>
+          <a:p>
+            <a:r>
+              <a:rPr lang="ko-KR" altLang="es-CL" dirty="0"/>
+              <a:t>문을 닫아요</a:t>
+            </a:r>
+            <a:endParaRPr lang="es-CL" dirty="0"/>
+          </a:p>
+        </p:txBody>
+      </p:sp>
     </p:spTree>
   </p:cSld>
   <p:clrMapOvr>
@@ -9326,7 +9663,32 @@
                 <a:ea typeface="Malgun Gothic" pitchFamily="34" charset="-122"/>
                 <a:cs typeface="Malgun Gothic" pitchFamily="34" charset="-120"/>
               </a:rPr>
-              <a:t>7시에 일어나요</a:t>
+              <a:t>7시</a:t>
+            </a:r>
+            <a:r>
+              <a:rPr lang="en-US" sz="2600" b="1" dirty="0">
+                <a:solidFill>
+                  <a:srgbClr val="FFFFFF"/>
+                </a:solidFill>
+                <a:highlight>
+                  <a:srgbClr val="000080"/>
+                </a:highlight>
+                <a:latin typeface="Malgun Gothic" pitchFamily="34" charset="0"/>
+                <a:ea typeface="Malgun Gothic" pitchFamily="34" charset="-122"/>
+                <a:cs typeface="Malgun Gothic" pitchFamily="34" charset="-120"/>
+              </a:rPr>
+              <a:t>에</a:t>
+            </a:r>
+            <a:r>
+              <a:rPr lang="en-US" sz="2600" b="1" dirty="0">
+                <a:solidFill>
+                  <a:srgbClr val="FFFFFF"/>
+                </a:solidFill>
+                <a:latin typeface="Malgun Gothic" pitchFamily="34" charset="0"/>
+                <a:ea typeface="Malgun Gothic" pitchFamily="34" charset="-122"/>
+                <a:cs typeface="Malgun Gothic" pitchFamily="34" charset="-120"/>
+              </a:rPr>
+              <a:t> 일어나요</a:t>
             </a:r>
             <a:endParaRPr lang="en-US" sz="2600" dirty="0"/>
           </a:p>
@@ -9431,7 +9793,57 @@
                 <a:ea typeface="Malgun Gothic" pitchFamily="34" charset="-122"/>
                 <a:cs typeface="Malgun Gothic" pitchFamily="34" charset="-120"/>
               </a:rPr>
-              <a:t>씻고 옷을 입어요</a:t>
+              <a:t>씻</a:t>
+            </a:r>
+            <a:r>
+              <a:rPr lang="en-US" sz="2600" b="1" dirty="0">
+                <a:solidFill>
+                  <a:srgbClr val="1A1A2E"/>
+                </a:solidFill>
+                <a:highlight>
+                  <a:srgbClr val="FFFF00"/>
+                </a:highlight>
+                <a:latin typeface="Malgun Gothic" pitchFamily="34" charset="0"/>
+                <a:ea typeface="Malgun Gothic" pitchFamily="34" charset="-122"/>
+                <a:cs typeface="Malgun Gothic" pitchFamily="34" charset="-120"/>
+              </a:rPr>
+              <a:t>고</a:t>
+            </a:r>
+            <a:r>
+              <a:rPr lang="en-US" sz="2600" b="1" dirty="0">
+                <a:solidFill>
+                  <a:srgbClr val="1A1A2E"/>
+                </a:solidFill>
+                <a:latin typeface="Malgun Gothic" pitchFamily="34" charset="0"/>
+                <a:ea typeface="Malgun Gothic" pitchFamily="34" charset="-122"/>
+                <a:cs typeface="Malgun Gothic" pitchFamily="34" charset="-120"/>
+              </a:rPr>
+              <a:t> 옷</a:t>
+            </a:r>
+            <a:r>
+              <a:rPr lang="en-US" sz="2600" b="1" dirty="0">
+                <a:solidFill>
+                  <a:srgbClr val="1A1A2E"/>
+                </a:solidFill>
+                <a:highlight>
+                  <a:srgbClr val="FFFF00"/>
+                </a:highlight>
+                <a:latin typeface="Malgun Gothic" pitchFamily="34" charset="0"/>
+                <a:ea typeface="Malgun Gothic" pitchFamily="34" charset="-122"/>
+                <a:cs typeface="Malgun Gothic" pitchFamily="34" charset="-120"/>
+              </a:rPr>
+              <a:t>을</a:t>
+            </a:r>
+            <a:r>
+              <a:rPr lang="en-US" sz="2600" b="1" dirty="0">
+                <a:solidFill>
+                  <a:srgbClr val="1A1A2E"/>
+                </a:solidFill>
+                <a:latin typeface="Malgun Gothic" pitchFamily="34" charset="0"/>
+                <a:ea typeface="Malgun Gothic" pitchFamily="34" charset="-122"/>
+                <a:cs typeface="Malgun Gothic" pitchFamily="34" charset="-120"/>
+              </a:rPr>
+              <a:t> 입어요</a:t>
             </a:r>
             <a:endParaRPr lang="en-US" sz="2600" dirty="0"/>
           </a:p>
@@ -9528,7 +9940,7 @@
               <a:buNone/>
             </a:pPr>
             <a:r>
-              <a:rPr lang="en-US" sz="2600" b="1" dirty="0">
+              <a:rPr lang="en-US" sz="2000" b="1" dirty="0">
                 <a:solidFill>
                   <a:srgbClr val="FFFFFF"/>
                 </a:solidFill>
@@ -9536,9 +9948,123 @@
                 <a:ea typeface="Malgun Gothic" pitchFamily="34" charset="-122"/>
                 <a:cs typeface="Malgun Gothic" pitchFamily="34" charset="-120"/>
               </a:rPr>
-              <a:t>8시에 아침을 먹어요</a:t>
-            </a:r>
-            <a:endParaRPr lang="en-US" sz="2600" dirty="0"/>
+              <a:t>8시</a:t>
+            </a:r>
+            <a:r>
+              <a:rPr lang="en-US" sz="2000" b="1" dirty="0">
+                <a:solidFill>
+                  <a:srgbClr val="FFFFFF"/>
+                </a:solidFill>
+                <a:highlight>
+                  <a:srgbClr val="FF00FF"/>
+                </a:highlight>
+                <a:latin typeface="Malgun Gothic" pitchFamily="34" charset="0"/>
+                <a:ea typeface="Malgun Gothic" pitchFamily="34" charset="-122"/>
+                <a:cs typeface="Malgun Gothic" pitchFamily="34" charset="-120"/>
+              </a:rPr>
+              <a:t>에</a:t>
+            </a:r>
+            <a:r>
+              <a:rPr lang="en-US" sz="2000" b="1" dirty="0">
+                <a:solidFill>
+                  <a:srgbClr val="FFFFFF"/>
+                </a:solidFill>
+                <a:latin typeface="Malgun Gothic" pitchFamily="34" charset="0"/>
+                <a:ea typeface="Malgun Gothic" pitchFamily="34" charset="-122"/>
+                <a:cs typeface="Malgun Gothic" pitchFamily="34" charset="-120"/>
+              </a:rPr>
+              <a:t> </a:t>
+            </a:r>
+            <a:r>
+              <a:rPr lang="en-US" sz="2000" b="1" dirty="0" err="1">
+                <a:solidFill>
+                  <a:srgbClr val="FFFFFF"/>
+                </a:solidFill>
+                <a:latin typeface="Malgun Gothic" pitchFamily="34" charset="0"/>
+                <a:ea typeface="Malgun Gothic" pitchFamily="34" charset="-122"/>
+                <a:cs typeface="Malgun Gothic" pitchFamily="34" charset="-120"/>
+              </a:rPr>
+              <a:t>아침</a:t>
+            </a:r>
+            <a:r>
+              <a:rPr lang="en-US" sz="2000" b="1" dirty="0" err="1">
+                <a:solidFill>
+                  <a:srgbClr val="FFFFFF"/>
+                </a:solidFill>
+                <a:highlight>
+                  <a:srgbClr val="FF00FF"/>
+                </a:highlight>
+                <a:latin typeface="Malgun Gothic" pitchFamily="34" charset="0"/>
+                <a:ea typeface="Malgun Gothic" pitchFamily="34" charset="-122"/>
+                <a:cs typeface="Malgun Gothic" pitchFamily="34" charset="-120"/>
+              </a:rPr>
+              <a:t>을</a:t>
+            </a:r>
+            <a:r>
+              <a:rPr lang="en-US" sz="2000" b="1" dirty="0">
+                <a:solidFill>
+                  <a:srgbClr val="FFFFFF"/>
+                </a:solidFill>
+                <a:latin typeface="Malgun Gothic" pitchFamily="34" charset="0"/>
+                <a:ea typeface="Malgun Gothic" pitchFamily="34" charset="-122"/>
+                <a:cs typeface="Malgun Gothic" pitchFamily="34" charset="-120"/>
+              </a:rPr>
+              <a:t> </a:t>
+            </a:r>
+            <a:r>
+              <a:rPr lang="en-US" sz="2000" b="1" dirty="0" err="1">
+                <a:solidFill>
+                  <a:srgbClr val="FFFFFF"/>
+                </a:solidFill>
+                <a:latin typeface="Malgun Gothic" pitchFamily="34" charset="0"/>
+                <a:ea typeface="Malgun Gothic" pitchFamily="34" charset="-122"/>
+                <a:cs typeface="Malgun Gothic" pitchFamily="34" charset="-120"/>
+              </a:rPr>
+              <a:t>먹어요</a:t>
+            </a:r>
+            <a:endParaRPr lang="en-US" sz="2000" b="1" dirty="0">
+              <a:solidFill>
+                <a:srgbClr val="FFFFFF"/>
+              </a:solidFill>
+              <a:latin typeface="Malgun Gothic" pitchFamily="34" charset="0"/>
+              <a:ea typeface="Malgun Gothic" pitchFamily="34" charset="-122"/>
+              <a:cs typeface="Malgun Gothic" pitchFamily="34" charset="-120"/>
+            </a:endParaRPr>
+          </a:p>
+          <a:p>
+            <a:pPr marL="0" indent="0" algn="ctr">
+              <a:buNone/>
+            </a:pPr>
+            <a:r>
+              <a:rPr lang="en-US" sz="2000" b="1" dirty="0">
+                <a:solidFill>
+                  <a:srgbClr val="FFFFFF"/>
+                </a:solidFill>
+                <a:latin typeface="Malgun Gothic" pitchFamily="34" charset="0"/>
+                <a:ea typeface="Malgun Gothic" pitchFamily="34" charset="-122"/>
+                <a:cs typeface="Malgun Gothic" pitchFamily="34" charset="-120"/>
+              </a:rPr>
+              <a:t>8 </a:t>
+            </a:r>
+            <a:r>
+              <a:rPr lang="es-CL" sz="2000" b="1" dirty="0">
+                <a:solidFill>
+                  <a:srgbClr val="FFFFFF"/>
+                </a:solidFill>
+                <a:latin typeface="Malgun Gothic" pitchFamily="34" charset="0"/>
+                <a:ea typeface="Malgun Gothic" pitchFamily="34" charset="-122"/>
+                <a:cs typeface="Malgun Gothic" pitchFamily="34" charset="-120"/>
+              </a:rPr>
+              <a:t>hora(a) desayuno como</a:t>
+            </a:r>
+            <a:endParaRPr lang="en-US" sz="2000" b="1" dirty="0">
+              <a:solidFill>
+                <a:srgbClr val="FFFFFF"/>
+              </a:solidFill>
+              <a:latin typeface="Malgun Gothic" pitchFamily="34" charset="0"/>
+              <a:ea typeface="Malgun Gothic" pitchFamily="34" charset="-122"/>
+              <a:cs typeface="Malgun Gothic" pitchFamily="34" charset="-120"/>
+            </a:endParaRPr>
           </a:p>
         </p:txBody>
       </p:sp>
@@ -9616,8 +10142,8 @@
         </p:nvSpPr>
         <p:spPr>
           <a:xfrm>
-            <a:off x="548640" y="4370832"/>
-            <a:ext cx="3657600" cy="1143000"/>
+            <a:off x="429768" y="4606052"/>
+            <a:ext cx="3776472" cy="1143000"/>
           </a:xfrm>
           <a:prstGeom prst="rect">
             <a:avLst/>
@@ -9633,7 +10159,7 @@
               <a:buNone/>
             </a:pPr>
             <a:r>
-              <a:rPr lang="en-US" sz="2600" b="1" dirty="0">
+              <a:rPr lang="en-US" sz="2000" b="1" dirty="0">
                 <a:solidFill>
                   <a:srgbClr val="FFFFFF"/>
                 </a:solidFill>
@@ -9641,9 +10167,169 @@
                 <a:ea typeface="Malgun Gothic" pitchFamily="34" charset="-122"/>
                 <a:cs typeface="Malgun Gothic" pitchFamily="34" charset="-120"/>
               </a:rPr>
-              <a:t>9시부터 6시까지 일해요</a:t>
-            </a:r>
-            <a:endParaRPr lang="en-US" sz="2600" dirty="0"/>
+              <a:t>9시</a:t>
+            </a:r>
+            <a:r>
+              <a:rPr lang="en-US" sz="2000" b="1" dirty="0">
+                <a:solidFill>
+                  <a:srgbClr val="FFFFFF"/>
+                </a:solidFill>
+                <a:highlight>
+                  <a:srgbClr val="FF00FF"/>
+                </a:highlight>
+                <a:latin typeface="Malgun Gothic" pitchFamily="34" charset="0"/>
+                <a:ea typeface="Malgun Gothic" pitchFamily="34" charset="-122"/>
+                <a:cs typeface="Malgun Gothic" pitchFamily="34" charset="-120"/>
+              </a:rPr>
+              <a:t>부터</a:t>
+            </a:r>
+            <a:r>
+              <a:rPr lang="en-US" sz="2000" b="1" dirty="0">
+                <a:solidFill>
+                  <a:srgbClr val="FFFFFF"/>
+                </a:solidFill>
+                <a:latin typeface="Malgun Gothic" pitchFamily="34" charset="0"/>
+                <a:ea typeface="Malgun Gothic" pitchFamily="34" charset="-122"/>
+                <a:cs typeface="Malgun Gothic" pitchFamily="34" charset="-120"/>
+              </a:rPr>
+              <a:t> 6시</a:t>
+            </a:r>
+            <a:r>
+              <a:rPr lang="en-US" sz="2000" b="1" dirty="0">
+                <a:solidFill>
+                  <a:srgbClr val="FFFFFF"/>
+                </a:solidFill>
+                <a:highlight>
+                  <a:srgbClr val="FF00FF"/>
+                </a:highlight>
+                <a:latin typeface="Malgun Gothic" pitchFamily="34" charset="0"/>
+                <a:ea typeface="Malgun Gothic" pitchFamily="34" charset="-122"/>
+                <a:cs typeface="Malgun Gothic" pitchFamily="34" charset="-120"/>
+              </a:rPr>
+              <a:t>까지</a:t>
+            </a:r>
+            <a:r>
+              <a:rPr lang="en-US" sz="2000" b="1" dirty="0">
+                <a:solidFill>
+                  <a:srgbClr val="FFFFFF"/>
+                </a:solidFill>
+                <a:latin typeface="Malgun Gothic" pitchFamily="34" charset="0"/>
+                <a:ea typeface="Malgun Gothic" pitchFamily="34" charset="-122"/>
+                <a:cs typeface="Malgun Gothic" pitchFamily="34" charset="-120"/>
+              </a:rPr>
+              <a:t> </a:t>
+            </a:r>
+          </a:p>
+          <a:p>
+            <a:pPr marL="0" indent="0" algn="ctr">
+              <a:buNone/>
+            </a:pPr>
+            <a:r>
+              <a:rPr lang="en-US" sz="2000" b="1" dirty="0">
+                <a:solidFill>
+                  <a:srgbClr val="FFFFFF"/>
+                </a:solidFill>
+                <a:latin typeface="Malgun Gothic" pitchFamily="34" charset="0"/>
+                <a:ea typeface="Malgun Gothic" pitchFamily="34" charset="-122"/>
+                <a:cs typeface="Malgun Gothic" pitchFamily="34" charset="-120"/>
+              </a:rPr>
+              <a:t>9</a:t>
+            </a:r>
+            <a:r>
+              <a:rPr lang="es-CL" sz="2000" b="1" dirty="0">
+                <a:solidFill>
+                  <a:srgbClr val="FFFFFF"/>
+                </a:solidFill>
+                <a:latin typeface="Malgun Gothic" pitchFamily="34" charset="0"/>
+                <a:ea typeface="Malgun Gothic" pitchFamily="34" charset="-122"/>
+                <a:cs typeface="Malgun Gothic" pitchFamily="34" charset="-120"/>
+              </a:rPr>
+              <a:t>hora(desde)</a:t>
+            </a:r>
+            <a:r>
+              <a:rPr lang="ko-KR" altLang="es-CL" sz="2000" b="1" dirty="0">
+                <a:solidFill>
+                  <a:srgbClr val="FFFFFF"/>
+                </a:solidFill>
+                <a:latin typeface="Malgun Gothic" pitchFamily="34" charset="0"/>
+                <a:ea typeface="Malgun Gothic" pitchFamily="34" charset="-122"/>
+                <a:cs typeface="Malgun Gothic" pitchFamily="34" charset="-120"/>
+              </a:rPr>
+              <a:t> </a:t>
+            </a:r>
+            <a:r>
+              <a:rPr lang="es-CL" altLang="ko-KR" sz="2000" b="1" dirty="0">
+                <a:solidFill>
+                  <a:srgbClr val="FFFFFF"/>
+                </a:solidFill>
+                <a:latin typeface="Malgun Gothic" pitchFamily="34" charset="0"/>
+                <a:ea typeface="Malgun Gothic" pitchFamily="34" charset="-122"/>
+                <a:cs typeface="Malgun Gothic" pitchFamily="34" charset="-120"/>
+              </a:rPr>
+              <a:t>6hora(hasta)</a:t>
+            </a:r>
+            <a:endParaRPr lang="en-US" sz="2000" b="1" dirty="0">
+              <a:solidFill>
+                <a:srgbClr val="FFFFFF"/>
+              </a:solidFill>
+              <a:latin typeface="Malgun Gothic" pitchFamily="34" charset="0"/>
+              <a:ea typeface="Malgun Gothic" pitchFamily="34" charset="-122"/>
+              <a:cs typeface="Malgun Gothic" pitchFamily="34" charset="-120"/>
+            </a:endParaRPr>
+          </a:p>
+          <a:p>
+            <a:pPr marL="0" indent="0" algn="ctr">
+              <a:buNone/>
+            </a:pPr>
+            <a:r>
+              <a:rPr lang="en-US" sz="2000" b="1" dirty="0" err="1">
+                <a:solidFill>
+                  <a:srgbClr val="FFFFFF"/>
+                </a:solidFill>
+                <a:latin typeface="Malgun Gothic" pitchFamily="34" charset="0"/>
+                <a:ea typeface="Malgun Gothic" pitchFamily="34" charset="-122"/>
+                <a:cs typeface="Malgun Gothic" pitchFamily="34" charset="-120"/>
+              </a:rPr>
+              <a:t>일해요</a:t>
+            </a:r>
+            <a:endParaRPr lang="en-US" sz="2000" b="1" dirty="0">
+              <a:solidFill>
+                <a:srgbClr val="FFFFFF"/>
+              </a:solidFill>
+              <a:latin typeface="Malgun Gothic" pitchFamily="34" charset="0"/>
+              <a:ea typeface="Malgun Gothic" pitchFamily="34" charset="-122"/>
+              <a:cs typeface="Malgun Gothic" pitchFamily="34" charset="-120"/>
+            </a:endParaRPr>
+          </a:p>
+          <a:p>
+            <a:pPr marL="0" indent="0" algn="ctr">
+              <a:buNone/>
+            </a:pPr>
+            <a:r>
+              <a:rPr lang="en-US" sz="2000" b="1" dirty="0" err="1">
+                <a:solidFill>
+                  <a:srgbClr val="FFFFFF"/>
+                </a:solidFill>
+                <a:latin typeface="Malgun Gothic" pitchFamily="34" charset="0"/>
+                <a:ea typeface="Malgun Gothic" pitchFamily="34" charset="-122"/>
+                <a:cs typeface="Malgun Gothic" pitchFamily="34" charset="-120"/>
+              </a:rPr>
+              <a:t>trabajo</a:t>
+            </a:r>
+            <a:endParaRPr lang="en-US" sz="2000" b="1" dirty="0">
+              <a:solidFill>
+                <a:srgbClr val="FFFFFF"/>
+              </a:solidFill>
+              <a:latin typeface="Malgun Gothic" pitchFamily="34" charset="0"/>
+              <a:ea typeface="Malgun Gothic" pitchFamily="34" charset="-122"/>
+              <a:cs typeface="Malgun Gothic" pitchFamily="34" charset="-120"/>
+            </a:endParaRPr>
+          </a:p>
+          <a:p>
+            <a:pPr marL="0" indent="0" algn="ctr">
+              <a:buNone/>
+            </a:pPr>
+            <a:endParaRPr lang="en-US" sz="2000" dirty="0"/>
           </a:p>
         </p:txBody>
       </p:sp>
@@ -9746,7 +10432,32 @@
                 <a:ea typeface="Malgun Gothic" pitchFamily="34" charset="-122"/>
                 <a:cs typeface="Malgun Gothic" pitchFamily="34" charset="-120"/>
               </a:rPr>
-              <a:t>운동하고 샤워해요</a:t>
+              <a:t>운동하</a:t>
+            </a:r>
+            <a:r>
+              <a:rPr lang="en-US" sz="2600" b="1" dirty="0">
+                <a:solidFill>
+                  <a:srgbClr val="1A1A2E"/>
+                </a:solidFill>
+                <a:highlight>
+                  <a:srgbClr val="FF00FF"/>
+                </a:highlight>
+                <a:latin typeface="Malgun Gothic" pitchFamily="34" charset="0"/>
+                <a:ea typeface="Malgun Gothic" pitchFamily="34" charset="-122"/>
+                <a:cs typeface="Malgun Gothic" pitchFamily="34" charset="-120"/>
+              </a:rPr>
+              <a:t>고</a:t>
+            </a:r>
+            <a:r>
+              <a:rPr lang="en-US" sz="2600" b="1" dirty="0">
+                <a:solidFill>
+                  <a:srgbClr val="1A1A2E"/>
+                </a:solidFill>
+                <a:latin typeface="Malgun Gothic" pitchFamily="34" charset="0"/>
+                <a:ea typeface="Malgun Gothic" pitchFamily="34" charset="-122"/>
+                <a:cs typeface="Malgun Gothic" pitchFamily="34" charset="-120"/>
+              </a:rPr>
+              <a:t> 샤워해요</a:t>
             </a:r>
             <a:endParaRPr lang="en-US" sz="2600" dirty="0"/>
           </a:p>
@@ -9851,7 +10562,32 @@
                 <a:ea typeface="Malgun Gothic" pitchFamily="34" charset="-122"/>
                 <a:cs typeface="Malgun Gothic" pitchFamily="34" charset="-120"/>
               </a:rPr>
-              <a:t>11시에 자요</a:t>
+              <a:t>11시</a:t>
+            </a:r>
+            <a:r>
+              <a:rPr lang="en-US" sz="2600" b="1" dirty="0">
+                <a:solidFill>
+                  <a:srgbClr val="FFFFFF"/>
+                </a:solidFill>
+                <a:highlight>
+                  <a:srgbClr val="FF00FF"/>
+                </a:highlight>
+                <a:latin typeface="Malgun Gothic" pitchFamily="34" charset="0"/>
+                <a:ea typeface="Malgun Gothic" pitchFamily="34" charset="-122"/>
+                <a:cs typeface="Malgun Gothic" pitchFamily="34" charset="-120"/>
+              </a:rPr>
+              <a:t>에</a:t>
+            </a:r>
+            <a:r>
+              <a:rPr lang="en-US" sz="2600" b="1" dirty="0">
+                <a:solidFill>
+                  <a:srgbClr val="FFFFFF"/>
+                </a:solidFill>
+                <a:latin typeface="Malgun Gothic" pitchFamily="34" charset="0"/>
+                <a:ea typeface="Malgun Gothic" pitchFamily="34" charset="-122"/>
+                <a:cs typeface="Malgun Gothic" pitchFamily="34" charset="-120"/>
+              </a:rPr>
+              <a:t> 자요</a:t>
             </a:r>
             <a:endParaRPr lang="en-US" sz="2600" dirty="0"/>
           </a:p>
@@ -10019,6 +10755,182 @@
               <a:t>SES 07  ·  HARUILGWA</a:t>
             </a:r>
             <a:endParaRPr lang="en-US" sz="800" dirty="0"/>
+          </a:p>
+        </p:txBody>
+      </p:sp>
+      <p:sp>
+        <p:nvSpPr>
+          <p:cNvPr id="26" name="TextBox 25">
+            <a:extLst>
+              <a:ext uri="{FF2B5EF4-FFF2-40B4-BE49-F238E27FC236}">
+                <a16:creationId xmlns:a16="http://schemas.microsoft.com/office/drawing/2014/main" id="{D5608845-420D-53A0-1161-88EFCF038AED}"/>
+              </a:ext>
+            </a:extLst>
+          </p:cNvPr>
+          <p:cNvSpPr txBox="1"/>
+          <p:nvPr/>
+        </p:nvSpPr>
+        <p:spPr>
+          <a:xfrm>
+            <a:off x="1280160" y="2941320"/>
+            <a:ext cx="2053191" cy="369332"/>
+          </a:xfrm>
+          <a:prstGeom prst="rect">
+            <a:avLst/>
+          </a:prstGeom>
+          <a:noFill/>
+        </p:spPr>
+        <p:txBody>
+          <a:bodyPr wrap="none" rtlCol="0">
+            <a:spAutoFit/>
+          </a:bodyPr>
+          <a:lstStyle/>
+          <a:p>
+            <a:r>
+              <a:rPr lang="es-CL" dirty="0"/>
+              <a:t>7 hora(a) levantarse</a:t>
+            </a:r>
+          </a:p>
+        </p:txBody>
+      </p:sp>
+      <p:sp>
+        <p:nvSpPr>
+          <p:cNvPr id="27" name="TextBox 26">
+            <a:extLst>
+              <a:ext uri="{FF2B5EF4-FFF2-40B4-BE49-F238E27FC236}">
+                <a16:creationId xmlns:a16="http://schemas.microsoft.com/office/drawing/2014/main" id="{EEC02639-EC62-2D0A-B0B2-3B7C29B34660}"/>
+              </a:ext>
+            </a:extLst>
+          </p:cNvPr>
+          <p:cNvSpPr txBox="1"/>
+          <p:nvPr/>
+        </p:nvSpPr>
+        <p:spPr>
+          <a:xfrm>
+            <a:off x="1397043" y="1882140"/>
+            <a:ext cx="1960793" cy="369332"/>
+          </a:xfrm>
+          <a:prstGeom prst="rect">
+            <a:avLst/>
+          </a:prstGeom>
+          <a:noFill/>
+        </p:spPr>
+        <p:txBody>
+          <a:bodyPr wrap="none" rtlCol="0">
+            <a:spAutoFit/>
+          </a:bodyPr>
+          <a:lstStyle/>
+          <a:p>
+            <a:r>
+              <a:rPr lang="ko-KR" altLang="es-CL" dirty="0"/>
+              <a:t>몇시에 일어나요</a:t>
+            </a:r>
+            <a:r>
+              <a:rPr lang="es-CL" altLang="ko-KR" dirty="0"/>
+              <a:t>?</a:t>
+            </a:r>
+            <a:endParaRPr lang="es-CL" dirty="0"/>
+          </a:p>
+        </p:txBody>
+      </p:sp>
+      <p:sp>
+        <p:nvSpPr>
+          <p:cNvPr id="28" name="TextBox 27">
+            <a:extLst>
+              <a:ext uri="{FF2B5EF4-FFF2-40B4-BE49-F238E27FC236}">
+                <a16:creationId xmlns:a16="http://schemas.microsoft.com/office/drawing/2014/main" id="{B52D5488-C506-08AA-E284-6A0B633C1653}"/>
+              </a:ext>
+            </a:extLst>
+          </p:cNvPr>
+          <p:cNvSpPr txBox="1"/>
+          <p:nvPr/>
+        </p:nvSpPr>
+        <p:spPr>
+          <a:xfrm>
+            <a:off x="4810236" y="726948"/>
+            <a:ext cx="1626856" cy="1200329"/>
+          </a:xfrm>
+          <a:prstGeom prst="rect">
+            <a:avLst/>
+          </a:prstGeom>
+          <a:noFill/>
+        </p:spPr>
+        <p:txBody>
+          <a:bodyPr wrap="none" rtlCol="0">
+            <a:spAutoFit/>
+          </a:bodyPr>
+          <a:lstStyle/>
+          <a:p>
+            <a:r>
+              <a:rPr lang="ko-KR" altLang="es-CL" dirty="0"/>
+              <a:t>씻다 </a:t>
+            </a:r>
+            <a:r>
+              <a:rPr lang="es-CL" altLang="ko-KR" dirty="0"/>
+              <a:t>‘lavarse’</a:t>
+            </a:r>
+          </a:p>
+          <a:p>
+            <a:r>
+              <a:rPr lang="ko-KR" altLang="es-CL" dirty="0"/>
+              <a:t>손을 씻어요</a:t>
+            </a:r>
+            <a:r>
+              <a:rPr lang="es-CL" altLang="ko-KR" dirty="0"/>
+              <a:t> </a:t>
+            </a:r>
+          </a:p>
+          <a:p>
+            <a:r>
+              <a:rPr lang="es-CL" altLang="ko-KR" dirty="0"/>
+              <a:t>Mano P/O lavo</a:t>
+            </a:r>
+          </a:p>
+          <a:p>
+            <a:r>
+              <a:rPr lang="ko-KR" altLang="es-CL" dirty="0"/>
+              <a:t>입다 </a:t>
+            </a:r>
+            <a:r>
+              <a:rPr lang="es-CL" altLang="ko-KR" dirty="0"/>
+              <a:t>‘vestirse’</a:t>
+            </a:r>
+            <a:endParaRPr lang="es-CL" dirty="0"/>
+          </a:p>
+        </p:txBody>
+      </p:sp>
+      <p:sp>
+        <p:nvSpPr>
+          <p:cNvPr id="29" name="TextBox 28">
+            <a:extLst>
+              <a:ext uri="{FF2B5EF4-FFF2-40B4-BE49-F238E27FC236}">
+                <a16:creationId xmlns:a16="http://schemas.microsoft.com/office/drawing/2014/main" id="{EE4C4A30-85C8-E250-A4BD-AF44A118CB88}"/>
+              </a:ext>
+            </a:extLst>
+          </p:cNvPr>
+          <p:cNvSpPr txBox="1"/>
+          <p:nvPr/>
+        </p:nvSpPr>
+        <p:spPr>
+          <a:xfrm>
+            <a:off x="5044440" y="5318761"/>
+            <a:ext cx="2938272" cy="369332"/>
+          </a:xfrm>
+          <a:prstGeom prst="rect">
+            <a:avLst/>
+          </a:prstGeom>
+          <a:noFill/>
+        </p:spPr>
+        <p:txBody>
+          <a:bodyPr wrap="square" rtlCol="0">
+            <a:spAutoFit/>
+          </a:bodyPr>
+          <a:lstStyle/>
+          <a:p>
+            <a:r>
+              <a:rPr lang="es-CL" dirty="0"/>
+              <a:t>Ejercio-y ducharse</a:t>
+            </a:r>
           </a:p>
         </p:txBody>
       </p:sp>
@@ -10206,6 +11118,56 @@
           </a:prstGeom>
         </p:spPr>
       </p:pic>
+      <p:sp>
+        <p:nvSpPr>
+          <p:cNvPr id="3" name="TextBox 2">
+            <a:extLst>
+              <a:ext uri="{FF2B5EF4-FFF2-40B4-BE49-F238E27FC236}">
+                <a16:creationId xmlns:a16="http://schemas.microsoft.com/office/drawing/2014/main" id="{2F447CA2-2B83-B9E3-1552-48441426171B}"/>
+              </a:ext>
+            </a:extLst>
+          </p:cNvPr>
+          <p:cNvSpPr txBox="1"/>
+          <p:nvPr/>
+        </p:nvSpPr>
+        <p:spPr>
+          <a:xfrm>
+            <a:off x="8885382" y="4655127"/>
+            <a:ext cx="1407758" cy="830997"/>
+          </a:xfrm>
+          <a:prstGeom prst="rect">
+            <a:avLst/>
+          </a:prstGeom>
+          <a:noFill/>
+        </p:spPr>
+        <p:txBody>
+          <a:bodyPr wrap="none" rtlCol="0">
+            <a:spAutoFit/>
+          </a:bodyPr>
+          <a:lstStyle/>
+          <a:p>
+            <a:r>
+              <a:rPr lang="es-CL" sz="2400" dirty="0"/>
+              <a:t>[</a:t>
+            </a:r>
+            <a:r>
+              <a:rPr lang="ko-KR" altLang="es-CL" sz="2400" dirty="0"/>
+              <a:t>슴니다</a:t>
+            </a:r>
+            <a:r>
+              <a:rPr lang="es-CL" altLang="ko-KR" sz="2400" dirty="0"/>
+              <a:t>]</a:t>
+            </a:r>
+          </a:p>
+          <a:p>
+            <a:r>
+              <a:rPr lang="es-CL" sz="2400" dirty="0" err="1"/>
+              <a:t>seumnida</a:t>
+            </a:r>
+            <a:endParaRPr lang="es-CL" sz="2400" dirty="0"/>
+          </a:p>
+        </p:txBody>
+      </p:sp>
     </p:spTree>
   </p:cSld>
   <p:clrMapOvr>
@@ -10255,6 +11217,108 @@
           </a:prstGeom>
         </p:spPr>
       </p:pic>
+      <p:sp>
+        <p:nvSpPr>
+          <p:cNvPr id="5" name="TextBox 4">
+            <a:extLst>
+              <a:ext uri="{FF2B5EF4-FFF2-40B4-BE49-F238E27FC236}">
+                <a16:creationId xmlns:a16="http://schemas.microsoft.com/office/drawing/2014/main" id="{A1280892-3069-550C-A5EC-D6E39478D89E}"/>
+              </a:ext>
+            </a:extLst>
+          </p:cNvPr>
+          <p:cNvSpPr txBox="1"/>
+          <p:nvPr/>
+        </p:nvSpPr>
+        <p:spPr>
+          <a:xfrm>
+            <a:off x="5407347" y="2749034"/>
+            <a:ext cx="1018227" cy="369332"/>
+          </a:xfrm>
+          <a:prstGeom prst="rect">
+            <a:avLst/>
+          </a:prstGeom>
+          <a:noFill/>
+        </p:spPr>
+        <p:txBody>
+          <a:bodyPr wrap="none" rtlCol="0">
+            <a:spAutoFit/>
+          </a:bodyPr>
+          <a:lstStyle/>
+          <a:p>
+            <a:r>
+              <a:rPr lang="es-CL" dirty="0"/>
+              <a:t>[</a:t>
+            </a:r>
+            <a:r>
+              <a:rPr lang="ko-KR" altLang="es-CL" dirty="0"/>
+              <a:t>옴니다</a:t>
+            </a:r>
+            <a:r>
+              <a:rPr lang="es-CL" altLang="ko-KR" dirty="0"/>
+              <a:t>]</a:t>
+            </a:r>
+            <a:endParaRPr lang="es-CL" dirty="0"/>
+          </a:p>
+        </p:txBody>
+      </p:sp>
+      <p:sp>
+        <p:nvSpPr>
+          <p:cNvPr id="4" name="TextBox 3">
+            <a:extLst>
+              <a:ext uri="{FF2B5EF4-FFF2-40B4-BE49-F238E27FC236}">
+                <a16:creationId xmlns:a16="http://schemas.microsoft.com/office/drawing/2014/main" id="{669B8EFE-120C-F1FF-2F61-1C6FD1728A9C}"/>
+              </a:ext>
+            </a:extLst>
+          </p:cNvPr>
+          <p:cNvSpPr txBox="1"/>
+          <p:nvPr/>
+        </p:nvSpPr>
+        <p:spPr>
+          <a:xfrm>
+            <a:off x="3581013" y="253306"/>
+            <a:ext cx="4670894" cy="1569660"/>
+          </a:xfrm>
+          <a:prstGeom prst="rect">
+            <a:avLst/>
+          </a:prstGeom>
+          <a:noFill/>
+        </p:spPr>
+        <p:txBody>
+          <a:bodyPr wrap="none" rtlCol="0">
+            <a:spAutoFit/>
+          </a:bodyPr>
+          <a:lstStyle/>
+          <a:p>
+            <a:r>
+              <a:rPr lang="ko-KR" altLang="es-CL" sz="2400" dirty="0"/>
+              <a:t>집에 갑니다            집에 옵니까</a:t>
+            </a:r>
+            <a:r>
+              <a:rPr lang="es-CL" altLang="ko-KR" sz="2400" dirty="0"/>
+              <a:t>?</a:t>
+            </a:r>
+          </a:p>
+          <a:p>
+            <a:r>
+              <a:rPr lang="es-CL" sz="2400" dirty="0"/>
+              <a:t>Casa(a, en) ir            casa(a, en) venir</a:t>
+            </a:r>
+          </a:p>
+          <a:p>
+            <a:r>
+              <a:rPr lang="ko-KR" altLang="es-CL" sz="2400" dirty="0"/>
+              <a:t>학교에 갑니다      병원에 갑니다</a:t>
+            </a:r>
+            <a:endParaRPr lang="es-CL" altLang="ko-KR" sz="2400" dirty="0"/>
+          </a:p>
+          <a:p>
+            <a:r>
+              <a:rPr lang="es-CL" sz="2400" dirty="0"/>
+              <a:t>Colegio(a, en) ir       hospital(a, en) ir</a:t>
+            </a:r>
+          </a:p>
+        </p:txBody>
+      </p:sp>
     </p:spTree>
   </p:cSld>
   <p:clrMapOvr>
@@ -10280,31 +11344,204 @@
           <a:chExt cx="0" cy="0"/>
         </a:xfrm>
       </p:grpSpPr>
-      <p:pic>
-        <p:nvPicPr>
-          <p:cNvPr id="2" name="Picture 1" descr="03_78_more.png"/>
-          <p:cNvPicPr>
-            <a:picLocks noChangeAspect="1"/>
-          </p:cNvPicPr>
-          <p:nvPr/>
-        </p:nvPicPr>
-        <p:blipFill>
-          <a:blip r:embed="rId2"/>
-          <a:stretch>
-            <a:fillRect/>
-          </a:stretch>
-        </p:blipFill>
-        <p:spPr>
-          <a:xfrm>
-            <a:off x="0" y="0"/>
-            <a:ext cx="12192000" cy="6858000"/>
-          </a:xfrm>
-          <a:prstGeom prst="rect">
-            <a:avLst/>
-          </a:prstGeom>
-        </p:spPr>
-      </p:pic>
+      <p:sp>
+        <p:nvSpPr>
+          <p:cNvPr id="3" name="TextBox 2">
+            <a:extLst>
+              <a:ext uri="{FF2B5EF4-FFF2-40B4-BE49-F238E27FC236}">
+                <a16:creationId xmlns:a16="http://schemas.microsoft.com/office/drawing/2014/main" id="{C7DC88C1-254F-52D3-2C6A-2A9BE8C526D3}"/>
+              </a:ext>
+            </a:extLst>
+          </p:cNvPr>
+          <p:cNvSpPr txBox="1"/>
+          <p:nvPr/>
+        </p:nvSpPr>
+        <p:spPr>
+          <a:xfrm>
+            <a:off x="715893" y="337126"/>
+            <a:ext cx="5537991" cy="4832092"/>
+          </a:xfrm>
+          <a:prstGeom prst="rect">
+            <a:avLst/>
+          </a:prstGeom>
+          <a:noFill/>
+        </p:spPr>
+        <p:txBody>
+          <a:bodyPr wrap="none" rtlCol="0">
+            <a:spAutoFit/>
+          </a:bodyPr>
+          <a:lstStyle/>
+          <a:p>
+            <a:r>
+              <a:rPr lang="ko-KR" altLang="es-CL" sz="4400" dirty="0"/>
+              <a:t>먹습니다</a:t>
+            </a:r>
+            <a:endParaRPr lang="es-CL" altLang="ko-KR" sz="4400" dirty="0"/>
+          </a:p>
+          <a:p>
+            <a:r>
+              <a:rPr lang="ko-KR" altLang="es-CL" sz="4400" dirty="0"/>
+              <a:t>사과</a:t>
+            </a:r>
+            <a:r>
+              <a:rPr lang="ko-KR" altLang="es-CL" sz="4400" dirty="0">
+                <a:highlight>
+                  <a:srgbClr val="FFFF00"/>
+                </a:highlight>
+              </a:rPr>
+              <a:t>를</a:t>
+            </a:r>
+            <a:r>
+              <a:rPr lang="ko-KR" altLang="es-CL" sz="4400" dirty="0"/>
+              <a:t> 먹습니다</a:t>
+            </a:r>
+            <a:endParaRPr lang="es-CL" sz="4400" dirty="0"/>
+          </a:p>
+          <a:p>
+            <a:r>
+              <a:rPr lang="es-CL" sz="4400" dirty="0"/>
+              <a:t>Manzana(PO) comer</a:t>
+            </a:r>
+          </a:p>
+          <a:p>
+            <a:r>
+              <a:rPr lang="ko-KR" altLang="es-CL" sz="4400" dirty="0"/>
+              <a:t>을</a:t>
+            </a:r>
+            <a:r>
+              <a:rPr lang="es-CL" altLang="ko-KR" sz="4400" dirty="0"/>
+              <a:t>/</a:t>
+            </a:r>
+            <a:r>
+              <a:rPr lang="ko-KR" altLang="es-CL" sz="4400" dirty="0"/>
+              <a:t>를 </a:t>
+            </a:r>
+            <a:r>
+              <a:rPr lang="es-CL" altLang="ko-KR" sz="4400" dirty="0"/>
+              <a:t>= </a:t>
+            </a:r>
+            <a:r>
+              <a:rPr lang="es-CL" altLang="ko-KR" sz="4400" dirty="0" err="1"/>
+              <a:t>particula</a:t>
+            </a:r>
+            <a:r>
+              <a:rPr lang="es-CL" altLang="ko-KR" sz="4400" dirty="0"/>
+              <a:t> verbo</a:t>
+            </a:r>
+            <a:endParaRPr lang="es-CL" sz="4400" dirty="0"/>
+          </a:p>
+          <a:p>
+            <a:r>
+              <a:rPr lang="ko-KR" altLang="es-CL" sz="4400" dirty="0"/>
+              <a:t>앉습니다</a:t>
+            </a:r>
+            <a:endParaRPr lang="es-CL" altLang="ko-KR" sz="4400" dirty="0"/>
+          </a:p>
+          <a:p>
+            <a:r>
+              <a:rPr lang="ko-KR" altLang="es-CL" sz="4400" dirty="0"/>
+              <a:t>의자에 앉습니다</a:t>
+            </a:r>
+            <a:endParaRPr lang="es-CL" altLang="ko-KR" sz="4400" dirty="0"/>
+          </a:p>
+          <a:p>
+            <a:r>
+              <a:rPr lang="es-CL" sz="4400" dirty="0"/>
+              <a:t>Silla(a, en) sentarse</a:t>
+            </a:r>
+          </a:p>
+        </p:txBody>
+      </p:sp>
+      <p:sp>
+        <p:nvSpPr>
+          <p:cNvPr id="4" name="TextBox 3">
+            <a:extLst>
+              <a:ext uri="{FF2B5EF4-FFF2-40B4-BE49-F238E27FC236}">
+                <a16:creationId xmlns:a16="http://schemas.microsoft.com/office/drawing/2014/main" id="{1DCB2FE3-A682-F86E-20A0-F45FDC175C66}"/>
+              </a:ext>
+            </a:extLst>
+          </p:cNvPr>
+          <p:cNvSpPr txBox="1"/>
+          <p:nvPr/>
+        </p:nvSpPr>
+        <p:spPr>
+          <a:xfrm>
+            <a:off x="6195060" y="337126"/>
+            <a:ext cx="2939651" cy="1754326"/>
+          </a:xfrm>
+          <a:prstGeom prst="rect">
+            <a:avLst/>
+          </a:prstGeom>
+          <a:noFill/>
+        </p:spPr>
+        <p:txBody>
+          <a:bodyPr wrap="none" rtlCol="0">
+            <a:spAutoFit/>
+          </a:bodyPr>
+          <a:lstStyle/>
+          <a:p>
+            <a:r>
+              <a:rPr lang="ko-KR" altLang="es-CL" sz="3600" dirty="0"/>
+              <a:t>은</a:t>
+            </a:r>
+            <a:r>
+              <a:rPr lang="es-CL" altLang="ko-KR" sz="3600" dirty="0"/>
+              <a:t>/</a:t>
+            </a:r>
+            <a:r>
+              <a:rPr lang="ko-KR" altLang="es-CL" sz="3600" dirty="0"/>
+              <a:t>는 </a:t>
+            </a:r>
+            <a:r>
+              <a:rPr lang="es-CL" altLang="ko-KR" sz="3600" dirty="0"/>
+              <a:t>= tema</a:t>
+            </a:r>
+          </a:p>
+          <a:p>
+            <a:r>
+              <a:rPr lang="ko-KR" altLang="es-CL" sz="3600" dirty="0"/>
+              <a:t>이</a:t>
+            </a:r>
+            <a:r>
+              <a:rPr lang="es-CL" altLang="ko-KR" sz="3600" dirty="0"/>
+              <a:t>/</a:t>
+            </a:r>
+            <a:r>
+              <a:rPr lang="ko-KR" altLang="es-CL" sz="3600" dirty="0"/>
+              <a:t>가 </a:t>
+            </a:r>
+            <a:r>
+              <a:rPr lang="es-CL" altLang="ko-KR" sz="3600" dirty="0"/>
+              <a:t>= sujeto</a:t>
+            </a:r>
+          </a:p>
+          <a:p>
+            <a:r>
+              <a:rPr lang="ko-KR" altLang="es-CL" sz="3600" dirty="0"/>
+              <a:t>을</a:t>
+            </a:r>
+            <a:r>
+              <a:rPr lang="es-CL" altLang="ko-KR" sz="3600" dirty="0"/>
+              <a:t>/</a:t>
+            </a:r>
+            <a:r>
+              <a:rPr lang="ko-KR" altLang="es-CL" sz="3600" dirty="0"/>
+              <a:t>를 </a:t>
+            </a:r>
+            <a:r>
+              <a:rPr lang="es-CL" altLang="ko-KR" sz="3600" dirty="0"/>
+              <a:t>= objeto</a:t>
+            </a:r>
+            <a:endParaRPr lang="es-CL" sz="3600" dirty="0"/>
+          </a:p>
+        </p:txBody>
+      </p:sp>
     </p:spTree>
+    <p:extLst>
+      <p:ext uri="{BB962C8B-B14F-4D97-AF65-F5344CB8AC3E}">
+        <p14:creationId xmlns:p14="http://schemas.microsoft.com/office/powerpoint/2010/main" val="1875751168"/>
+      </p:ext>
+    </p:extLst>
   </p:cSld>
   <p:clrMapOvr>
     <a:masterClrMapping/>
@@ -10331,7 +11568,7 @@
       </p:grpSpPr>
       <p:pic>
         <p:nvPicPr>
-          <p:cNvPr id="2" name="Picture 1" descr="04_78_convo.png"/>
+          <p:cNvPr id="2" name="Picture 1" descr="03_78_more.png"/>
           <p:cNvPicPr>
             <a:picLocks noChangeAspect="1"/>
           </p:cNvPicPr>
@@ -10353,6 +11590,341 @@
           </a:prstGeom>
         </p:spPr>
       </p:pic>
+      <p:sp>
+        <p:nvSpPr>
+          <p:cNvPr id="3" name="TextBox 2">
+            <a:extLst>
+              <a:ext uri="{FF2B5EF4-FFF2-40B4-BE49-F238E27FC236}">
+                <a16:creationId xmlns:a16="http://schemas.microsoft.com/office/drawing/2014/main" id="{529575F2-9A42-A7B4-0CBF-32E0AEA193FD}"/>
+              </a:ext>
+            </a:extLst>
+          </p:cNvPr>
+          <p:cNvSpPr txBox="1"/>
+          <p:nvPr/>
+        </p:nvSpPr>
+        <p:spPr>
+          <a:xfrm>
+            <a:off x="4242608" y="515064"/>
+            <a:ext cx="1853392" cy="369332"/>
+          </a:xfrm>
+          <a:prstGeom prst="rect">
+            <a:avLst/>
+          </a:prstGeom>
+          <a:noFill/>
+        </p:spPr>
+        <p:txBody>
+          <a:bodyPr wrap="none" rtlCol="0">
+            <a:spAutoFit/>
+          </a:bodyPr>
+          <a:lstStyle/>
+          <a:p>
+            <a:r>
+              <a:rPr lang="ko-KR" altLang="es-CL" dirty="0"/>
+              <a:t>침대</a:t>
+            </a:r>
+            <a:r>
+              <a:rPr lang="ko-KR" altLang="es-CL" dirty="0">
+                <a:highlight>
+                  <a:srgbClr val="FFFF00"/>
+                </a:highlight>
+              </a:rPr>
+              <a:t>에서</a:t>
+            </a:r>
+            <a:r>
+              <a:rPr lang="ko-KR" altLang="es-CL" dirty="0"/>
+              <a:t> 잡니다</a:t>
+            </a:r>
+            <a:endParaRPr lang="es-CL" dirty="0"/>
+          </a:p>
+        </p:txBody>
+      </p:sp>
+      <p:sp>
+        <p:nvSpPr>
+          <p:cNvPr id="4" name="TextBox 3">
+            <a:extLst>
+              <a:ext uri="{FF2B5EF4-FFF2-40B4-BE49-F238E27FC236}">
+                <a16:creationId xmlns:a16="http://schemas.microsoft.com/office/drawing/2014/main" id="{A8EDDC48-1116-88EF-0E6C-0D0CD6C749FF}"/>
+              </a:ext>
+            </a:extLst>
+          </p:cNvPr>
+          <p:cNvSpPr txBox="1"/>
+          <p:nvPr/>
+        </p:nvSpPr>
+        <p:spPr>
+          <a:xfrm>
+            <a:off x="7122562" y="354695"/>
+            <a:ext cx="2656496" cy="1200329"/>
+          </a:xfrm>
+          <a:prstGeom prst="rect">
+            <a:avLst/>
+          </a:prstGeom>
+          <a:noFill/>
+        </p:spPr>
+        <p:txBody>
+          <a:bodyPr wrap="none" rtlCol="0">
+            <a:spAutoFit/>
+          </a:bodyPr>
+          <a:lstStyle/>
+          <a:p>
+            <a:r>
+              <a:rPr lang="ko-KR" altLang="es-CL" dirty="0"/>
+              <a:t>침대에서 잡니까</a:t>
+            </a:r>
+            <a:r>
+              <a:rPr lang="es-CL" altLang="ko-KR" dirty="0"/>
+              <a:t>?</a:t>
+            </a:r>
+          </a:p>
+          <a:p>
+            <a:r>
+              <a:rPr lang="es-CL" altLang="ko-KR" dirty="0"/>
+              <a:t>Cama(en) </a:t>
+            </a:r>
+            <a:r>
+              <a:rPr lang="es-CL" altLang="ko-KR" dirty="0" err="1"/>
+              <a:t>domir</a:t>
+            </a:r>
+            <a:endParaRPr lang="es-CL" altLang="ko-KR" dirty="0"/>
+          </a:p>
+          <a:p>
+            <a:r>
+              <a:rPr lang="ko-KR" altLang="es-CL" dirty="0"/>
+              <a:t>아니요</a:t>
+            </a:r>
+            <a:r>
+              <a:rPr lang="es-CL" altLang="ko-KR" dirty="0"/>
+              <a:t>, </a:t>
+            </a:r>
+            <a:r>
+              <a:rPr lang="ko-KR" altLang="es-CL" dirty="0"/>
+              <a:t>소파</a:t>
+            </a:r>
+            <a:r>
+              <a:rPr lang="ko-KR" altLang="es-CL" dirty="0">
+                <a:highlight>
+                  <a:srgbClr val="FFFF00"/>
+                </a:highlight>
+              </a:rPr>
+              <a:t>에서</a:t>
+            </a:r>
+            <a:r>
+              <a:rPr lang="ko-KR" altLang="es-CL" dirty="0"/>
+              <a:t> 잡니다</a:t>
+            </a:r>
+            <a:endParaRPr lang="es-CL" altLang="ko-KR" dirty="0"/>
+          </a:p>
+          <a:p>
+            <a:r>
+              <a:rPr lang="es-CL" dirty="0"/>
+              <a:t>No, </a:t>
+            </a:r>
+            <a:r>
+              <a:rPr lang="es-CL" dirty="0" err="1"/>
+              <a:t>sillon</a:t>
+            </a:r>
+            <a:r>
+              <a:rPr lang="es-CL" dirty="0"/>
+              <a:t>(en) dormir</a:t>
+            </a:r>
+          </a:p>
+        </p:txBody>
+      </p:sp>
+      <p:sp>
+        <p:nvSpPr>
+          <p:cNvPr id="6" name="TextBox 5">
+            <a:extLst>
+              <a:ext uri="{FF2B5EF4-FFF2-40B4-BE49-F238E27FC236}">
+                <a16:creationId xmlns:a16="http://schemas.microsoft.com/office/drawing/2014/main" id="{9353FF35-5467-B418-FAC3-66D494D31B2C}"/>
+              </a:ext>
+            </a:extLst>
+          </p:cNvPr>
+          <p:cNvSpPr txBox="1"/>
+          <p:nvPr/>
+        </p:nvSpPr>
+        <p:spPr>
+          <a:xfrm>
+            <a:off x="8229600" y="2702004"/>
+            <a:ext cx="1338828" cy="369332"/>
+          </a:xfrm>
+          <a:prstGeom prst="rect">
+            <a:avLst/>
+          </a:prstGeom>
+          <a:noFill/>
+        </p:spPr>
+        <p:txBody>
+          <a:bodyPr wrap="none" rtlCol="0">
+            <a:spAutoFit/>
+          </a:bodyPr>
+          <a:lstStyle/>
+          <a:p>
+            <a:r>
+              <a:rPr lang="ko-KR" altLang="es-CL" dirty="0"/>
+              <a:t>주비입니다</a:t>
+            </a:r>
+            <a:endParaRPr lang="es-CL" dirty="0"/>
+          </a:p>
+        </p:txBody>
+      </p:sp>
+      <p:sp>
+        <p:nvSpPr>
+          <p:cNvPr id="8" name="TextBox 7">
+            <a:extLst>
+              <a:ext uri="{FF2B5EF4-FFF2-40B4-BE49-F238E27FC236}">
+                <a16:creationId xmlns:a16="http://schemas.microsoft.com/office/drawing/2014/main" id="{D7A236B3-C124-FC2D-4D0E-D2E4E4433A42}"/>
+              </a:ext>
+            </a:extLst>
+          </p:cNvPr>
+          <p:cNvSpPr txBox="1"/>
+          <p:nvPr/>
+        </p:nvSpPr>
+        <p:spPr>
+          <a:xfrm>
+            <a:off x="8229600" y="3333513"/>
+            <a:ext cx="2598788" cy="646331"/>
+          </a:xfrm>
+          <a:prstGeom prst="rect">
+            <a:avLst/>
+          </a:prstGeom>
+          <a:noFill/>
+        </p:spPr>
+        <p:txBody>
+          <a:bodyPr wrap="none" rtlCol="0">
+            <a:spAutoFit/>
+          </a:bodyPr>
+          <a:lstStyle/>
+          <a:p>
+            <a:r>
+              <a:rPr lang="ko-KR" altLang="es-CL" dirty="0"/>
+              <a:t>종이 비행기</a:t>
+            </a:r>
+            <a:r>
+              <a:rPr lang="ko-KR" altLang="es-CL" dirty="0">
+                <a:highlight>
+                  <a:srgbClr val="FFFF00"/>
+                </a:highlight>
+              </a:rPr>
+              <a:t>를</a:t>
+            </a:r>
+            <a:r>
+              <a:rPr lang="ko-KR" altLang="es-CL" dirty="0"/>
+              <a:t> 만듭니다</a:t>
+            </a:r>
+            <a:endParaRPr lang="es-CL" altLang="ko-KR" dirty="0"/>
+          </a:p>
+          <a:p>
+            <a:r>
+              <a:rPr lang="es-CL" dirty="0"/>
+              <a:t>Papel avión(PO) crear</a:t>
+            </a:r>
+          </a:p>
+        </p:txBody>
+      </p:sp>
+      <p:sp>
+        <p:nvSpPr>
+          <p:cNvPr id="10" name="TextBox 9">
+            <a:extLst>
+              <a:ext uri="{FF2B5EF4-FFF2-40B4-BE49-F238E27FC236}">
+                <a16:creationId xmlns:a16="http://schemas.microsoft.com/office/drawing/2014/main" id="{A81F7EEE-9CA7-4BC2-E6C2-17C27F655642}"/>
+              </a:ext>
+            </a:extLst>
+          </p:cNvPr>
+          <p:cNvSpPr txBox="1"/>
+          <p:nvPr/>
+        </p:nvSpPr>
+        <p:spPr>
+          <a:xfrm>
+            <a:off x="8382000" y="3960940"/>
+            <a:ext cx="2553328" cy="646331"/>
+          </a:xfrm>
+          <a:prstGeom prst="rect">
+            <a:avLst/>
+          </a:prstGeom>
+          <a:noFill/>
+        </p:spPr>
+        <p:txBody>
+          <a:bodyPr wrap="none" rtlCol="0">
+            <a:spAutoFit/>
+          </a:bodyPr>
+          <a:lstStyle/>
+          <a:p>
+            <a:r>
+              <a:rPr lang="ko-KR" altLang="es-CL" dirty="0"/>
+              <a:t>무슨 책</a:t>
+            </a:r>
+            <a:r>
+              <a:rPr lang="ko-KR" altLang="es-CL" dirty="0">
+                <a:highlight>
+                  <a:srgbClr val="FFFF00"/>
+                </a:highlight>
+              </a:rPr>
+              <a:t>을</a:t>
+            </a:r>
+            <a:r>
+              <a:rPr lang="ko-KR" altLang="es-CL" dirty="0"/>
+              <a:t> 읽습니까</a:t>
+            </a:r>
+            <a:r>
+              <a:rPr lang="es-CL" altLang="ko-KR" dirty="0"/>
+              <a:t>?</a:t>
+            </a:r>
+          </a:p>
+          <a:p>
+            <a:r>
+              <a:rPr lang="es-CL" dirty="0"/>
+              <a:t>Que libro(PO) leer formal</a:t>
+            </a:r>
+          </a:p>
+        </p:txBody>
+      </p:sp>
+      <p:sp>
+        <p:nvSpPr>
+          <p:cNvPr id="12" name="TextBox 11">
+            <a:extLst>
+              <a:ext uri="{FF2B5EF4-FFF2-40B4-BE49-F238E27FC236}">
+                <a16:creationId xmlns:a16="http://schemas.microsoft.com/office/drawing/2014/main" id="{CA50AA7B-FDEE-4ECA-6142-0E98E4BFC3B1}"/>
+              </a:ext>
+            </a:extLst>
+          </p:cNvPr>
+          <p:cNvSpPr txBox="1"/>
+          <p:nvPr/>
+        </p:nvSpPr>
+        <p:spPr>
+          <a:xfrm>
+            <a:off x="8313420" y="4735876"/>
+            <a:ext cx="2855077" cy="646331"/>
+          </a:xfrm>
+          <a:prstGeom prst="rect">
+            <a:avLst/>
+          </a:prstGeom>
+          <a:noFill/>
+        </p:spPr>
+        <p:txBody>
+          <a:bodyPr wrap="none" rtlCol="0">
+            <a:spAutoFit/>
+          </a:bodyPr>
+          <a:lstStyle/>
+          <a:p>
+            <a:r>
+              <a:rPr lang="ko-KR" altLang="es-CL" dirty="0"/>
+              <a:t>연필이 있습니까</a:t>
+            </a:r>
+            <a:r>
+              <a:rPr lang="es-CL" altLang="ko-KR" dirty="0"/>
+              <a:t>?</a:t>
+            </a:r>
+          </a:p>
+          <a:p>
+            <a:r>
+              <a:rPr lang="es-CL" dirty="0" err="1"/>
+              <a:t>Lapiz</a:t>
+            </a:r>
+            <a:r>
+              <a:rPr lang="es-CL" dirty="0"/>
+              <a:t>(P/S) haber/tener/estar</a:t>
+            </a:r>
+          </a:p>
+        </p:txBody>
+      </p:sp>
     </p:spTree>
   </p:cSld>
   <p:clrMapOvr>
@@ -10380,7 +11952,7 @@
       </p:grpSpPr>
       <p:pic>
         <p:nvPicPr>
-          <p:cNvPr id="2" name="Picture 1" descr="05_79_focus.png"/>
+          <p:cNvPr id="2" name="Picture 1" descr="04_78_convo.png"/>
           <p:cNvPicPr>
             <a:picLocks noChangeAspect="1"/>
           </p:cNvPicPr>
@@ -10402,6 +11974,76 @@
           </a:prstGeom>
         </p:spPr>
       </p:pic>
+      <p:sp>
+        <p:nvSpPr>
+          <p:cNvPr id="3" name="TextBox 2">
+            <a:extLst>
+              <a:ext uri="{FF2B5EF4-FFF2-40B4-BE49-F238E27FC236}">
+                <a16:creationId xmlns:a16="http://schemas.microsoft.com/office/drawing/2014/main" id="{8FDDEB32-FCA2-C6A2-E952-0E86AEC9E53E}"/>
+              </a:ext>
+            </a:extLst>
+          </p:cNvPr>
+          <p:cNvSpPr txBox="1"/>
+          <p:nvPr/>
+        </p:nvSpPr>
+        <p:spPr>
+          <a:xfrm>
+            <a:off x="4194048" y="1999488"/>
+            <a:ext cx="1800493" cy="646331"/>
+          </a:xfrm>
+          <a:prstGeom prst="rect">
+            <a:avLst/>
+          </a:prstGeom>
+          <a:noFill/>
+        </p:spPr>
+        <p:txBody>
+          <a:bodyPr wrap="none" rtlCol="0">
+            <a:spAutoFit/>
+          </a:bodyPr>
+          <a:lstStyle/>
+          <a:p>
+            <a:r>
+              <a:rPr lang="ko-KR" altLang="es-CL" dirty="0"/>
+              <a:t>습니다</a:t>
+            </a:r>
+            <a:r>
+              <a:rPr lang="es-CL" altLang="ko-KR" dirty="0"/>
+              <a:t>/</a:t>
+            </a:r>
+            <a:r>
+              <a:rPr lang="ko-KR" altLang="es-CL" dirty="0"/>
+              <a:t>습니까</a:t>
+            </a:r>
+            <a:r>
+              <a:rPr lang="es-CL" altLang="ko-KR" dirty="0"/>
+              <a:t>?</a:t>
+            </a:r>
+          </a:p>
+          <a:p>
+            <a:r>
+              <a:rPr lang="es-CL" dirty="0"/>
+              <a:t>[</a:t>
+            </a:r>
+            <a:r>
+              <a:rPr lang="ko-KR" altLang="es-CL" dirty="0"/>
+              <a:t>슴니다</a:t>
+            </a:r>
+            <a:r>
+              <a:rPr lang="es-CL" altLang="ko-KR" dirty="0"/>
+              <a:t>/</a:t>
+            </a:r>
+            <a:r>
+              <a:rPr lang="ko-KR" altLang="es-CL" dirty="0"/>
+              <a:t>슴니까</a:t>
+            </a:r>
+            <a:r>
+              <a:rPr lang="es-CL" altLang="ko-KR" dirty="0"/>
+              <a:t>]</a:t>
+            </a:r>
+            <a:endParaRPr lang="es-CL" dirty="0"/>
+          </a:p>
+        </p:txBody>
+      </p:sp>
     </p:spTree>
   </p:cSld>
   <p:clrMapOvr>
@@ -10429,7 +12071,7 @@
       </p:grpSpPr>
       <p:pic>
         <p:nvPicPr>
-          <p:cNvPr id="2" name="Picture 1" descr="06_79_ayo.png"/>
+          <p:cNvPr id="2" name="Picture 1" descr="05_79_focus.png"/>
           <p:cNvPicPr>
             <a:picLocks noChangeAspect="1"/>
           </p:cNvPicPr>
@@ -10478,7 +12120,7 @@
       </p:grpSpPr>
       <p:pic>
         <p:nvPicPr>
-          <p:cNvPr id="2" name="Picture 1" descr="07_79_eoyo.png"/>
+          <p:cNvPr id="2" name="Picture 1" descr="06_79_ayo.png"/>
           <p:cNvPicPr>
             <a:picLocks noChangeAspect="1"/>
           </p:cNvPicPr>
@@ -10500,6 +12142,413 @@
           </a:prstGeom>
         </p:spPr>
       </p:pic>
+      <p:sp>
+        <p:nvSpPr>
+          <p:cNvPr id="3" name="TextBox 2">
+            <a:extLst>
+              <a:ext uri="{FF2B5EF4-FFF2-40B4-BE49-F238E27FC236}">
+                <a16:creationId xmlns:a16="http://schemas.microsoft.com/office/drawing/2014/main" id="{A3754BFE-9D52-2A74-DB07-00C90F2E5606}"/>
+              </a:ext>
+            </a:extLst>
+          </p:cNvPr>
+          <p:cNvSpPr txBox="1"/>
+          <p:nvPr/>
+        </p:nvSpPr>
+        <p:spPr>
+          <a:xfrm>
+            <a:off x="3208020" y="2125980"/>
+            <a:ext cx="877163" cy="369332"/>
+          </a:xfrm>
+          <a:prstGeom prst="rect">
+            <a:avLst/>
+          </a:prstGeom>
+          <a:noFill/>
+        </p:spPr>
+        <p:txBody>
+          <a:bodyPr wrap="none" rtlCol="0">
+            <a:spAutoFit/>
+          </a:bodyPr>
+          <a:lstStyle/>
+          <a:p>
+            <a:r>
+              <a:rPr lang="ko-KR" altLang="es-CL" dirty="0">
+                <a:highlight>
+                  <a:srgbClr val="FFFF00"/>
+                </a:highlight>
+              </a:rPr>
+              <a:t>앉</a:t>
+            </a:r>
+            <a:r>
+              <a:rPr lang="ko-KR" altLang="es-CL" dirty="0"/>
+              <a:t>아요</a:t>
+            </a:r>
+            <a:endParaRPr lang="es-CL" dirty="0"/>
+          </a:p>
+        </p:txBody>
+      </p:sp>
+      <p:sp>
+        <p:nvSpPr>
+          <p:cNvPr id="4" name="TextBox 3">
+            <a:extLst>
+              <a:ext uri="{FF2B5EF4-FFF2-40B4-BE49-F238E27FC236}">
+                <a16:creationId xmlns:a16="http://schemas.microsoft.com/office/drawing/2014/main" id="{235003E8-5F62-4F12-4578-7CB622FF1FC9}"/>
+              </a:ext>
+            </a:extLst>
+          </p:cNvPr>
+          <p:cNvSpPr txBox="1"/>
+          <p:nvPr/>
+        </p:nvSpPr>
+        <p:spPr>
+          <a:xfrm>
+            <a:off x="4232910" y="1322070"/>
+            <a:ext cx="1035861" cy="923330"/>
+          </a:xfrm>
+          <a:prstGeom prst="rect">
+            <a:avLst/>
+          </a:prstGeom>
+          <a:noFill/>
+        </p:spPr>
+        <p:txBody>
+          <a:bodyPr wrap="none" rtlCol="0">
+            <a:spAutoFit/>
+          </a:bodyPr>
+          <a:lstStyle/>
+          <a:p>
+            <a:r>
+              <a:rPr lang="ko-KR" altLang="es-CL" dirty="0"/>
+              <a:t>한  </a:t>
+            </a:r>
+            <a:r>
+              <a:rPr lang="ko-KR" altLang="es-CL" dirty="0">
+                <a:highlight>
+                  <a:srgbClr val="00FFFF"/>
+                </a:highlight>
+              </a:rPr>
+              <a:t>ㅎ</a:t>
+            </a:r>
+            <a:r>
+              <a:rPr lang="ko-KR" altLang="es-CL" dirty="0"/>
+              <a:t> </a:t>
+            </a:r>
+            <a:r>
+              <a:rPr lang="ko-KR" altLang="es-CL" dirty="0">
+                <a:highlight>
+                  <a:srgbClr val="FFFF00"/>
+                </a:highlight>
+              </a:rPr>
+              <a:t>ㅏ</a:t>
+            </a:r>
+            <a:endParaRPr lang="es-CL" altLang="ko-KR" dirty="0">
+              <a:highlight>
+                <a:srgbClr val="FFFF00"/>
+              </a:highlight>
+            </a:endParaRPr>
+          </a:p>
+          <a:p>
+            <a:r>
+              <a:rPr lang="es-CL" dirty="0"/>
+              <a:t>         </a:t>
+            </a:r>
+            <a:r>
+              <a:rPr lang="ko-KR" altLang="es-CL" dirty="0">
+                <a:highlight>
+                  <a:srgbClr val="FF00FF"/>
+                </a:highlight>
+              </a:rPr>
+              <a:t>ㄴ</a:t>
+            </a:r>
+            <a:endParaRPr lang="es-CL" altLang="ko-KR" dirty="0">
+              <a:highlight>
+                <a:srgbClr val="FF00FF"/>
+              </a:highlight>
+            </a:endParaRPr>
+          </a:p>
+          <a:p>
+            <a:endParaRPr lang="es-CL" dirty="0"/>
+          </a:p>
+        </p:txBody>
+      </p:sp>
+      <p:sp>
+        <p:nvSpPr>
+          <p:cNvPr id="5" name="TextBox 4">
+            <a:extLst>
+              <a:ext uri="{FF2B5EF4-FFF2-40B4-BE49-F238E27FC236}">
+                <a16:creationId xmlns:a16="http://schemas.microsoft.com/office/drawing/2014/main" id="{AC54E68A-D5FE-1418-C0A4-D308D84B9F43}"/>
+              </a:ext>
+            </a:extLst>
+          </p:cNvPr>
+          <p:cNvSpPr txBox="1"/>
+          <p:nvPr/>
+        </p:nvSpPr>
+        <p:spPr>
+          <a:xfrm>
+            <a:off x="1424940" y="1985010"/>
+            <a:ext cx="975652" cy="369332"/>
+          </a:xfrm>
+          <a:prstGeom prst="rect">
+            <a:avLst/>
+          </a:prstGeom>
+          <a:noFill/>
+        </p:spPr>
+        <p:txBody>
+          <a:bodyPr wrap="none" rtlCol="0">
+            <a:spAutoFit/>
+          </a:bodyPr>
+          <a:lstStyle/>
+          <a:p>
+            <a:r>
+              <a:rPr lang="es-CL" dirty="0"/>
+              <a:t>sentarse</a:t>
+            </a:r>
+          </a:p>
+        </p:txBody>
+      </p:sp>
+      <p:sp>
+        <p:nvSpPr>
+          <p:cNvPr id="6" name="TextBox 5">
+            <a:extLst>
+              <a:ext uri="{FF2B5EF4-FFF2-40B4-BE49-F238E27FC236}">
+                <a16:creationId xmlns:a16="http://schemas.microsoft.com/office/drawing/2014/main" id="{2968D029-D6AA-0DEE-C11E-94B7E592BDBE}"/>
+              </a:ext>
+            </a:extLst>
+          </p:cNvPr>
+          <p:cNvSpPr txBox="1"/>
+          <p:nvPr/>
+        </p:nvSpPr>
+        <p:spPr>
+          <a:xfrm>
+            <a:off x="1360170" y="2670810"/>
+            <a:ext cx="579005" cy="369332"/>
+          </a:xfrm>
+          <a:prstGeom prst="rect">
+            <a:avLst/>
+          </a:prstGeom>
+          <a:noFill/>
+        </p:spPr>
+        <p:txBody>
+          <a:bodyPr wrap="none" rtlCol="0">
+            <a:spAutoFit/>
+          </a:bodyPr>
+          <a:lstStyle/>
+          <a:p>
+            <a:r>
+              <a:rPr lang="es-CL" dirty="0"/>
+              <a:t>vivir</a:t>
+            </a:r>
+          </a:p>
+        </p:txBody>
+      </p:sp>
+      <p:sp>
+        <p:nvSpPr>
+          <p:cNvPr id="7" name="TextBox 6">
+            <a:extLst>
+              <a:ext uri="{FF2B5EF4-FFF2-40B4-BE49-F238E27FC236}">
+                <a16:creationId xmlns:a16="http://schemas.microsoft.com/office/drawing/2014/main" id="{63B40EDB-355F-015E-DC17-460F557ED6D4}"/>
+              </a:ext>
+            </a:extLst>
+          </p:cNvPr>
+          <p:cNvSpPr txBox="1"/>
+          <p:nvPr/>
+        </p:nvSpPr>
+        <p:spPr>
+          <a:xfrm>
+            <a:off x="1424940" y="3303270"/>
+            <a:ext cx="317716" cy="369332"/>
+          </a:xfrm>
+          <a:prstGeom prst="rect">
+            <a:avLst/>
+          </a:prstGeom>
+          <a:noFill/>
+        </p:spPr>
+        <p:txBody>
+          <a:bodyPr wrap="none" rtlCol="0">
+            <a:spAutoFit/>
+          </a:bodyPr>
+          <a:lstStyle/>
+          <a:p>
+            <a:r>
+              <a:rPr lang="es-CL" dirty="0"/>
+              <a:t>ir</a:t>
+            </a:r>
+          </a:p>
+        </p:txBody>
+      </p:sp>
+      <p:sp>
+        <p:nvSpPr>
+          <p:cNvPr id="8" name="TextBox 7">
+            <a:extLst>
+              <a:ext uri="{FF2B5EF4-FFF2-40B4-BE49-F238E27FC236}">
+                <a16:creationId xmlns:a16="http://schemas.microsoft.com/office/drawing/2014/main" id="{2F6E8321-6A28-484E-0AC8-0A4FBC814D73}"/>
+              </a:ext>
+            </a:extLst>
+          </p:cNvPr>
+          <p:cNvSpPr txBox="1"/>
+          <p:nvPr/>
+        </p:nvSpPr>
+        <p:spPr>
+          <a:xfrm>
+            <a:off x="5326380" y="3970020"/>
+            <a:ext cx="1225400" cy="369332"/>
+          </a:xfrm>
+          <a:prstGeom prst="rect">
+            <a:avLst/>
+          </a:prstGeom>
+          <a:noFill/>
+        </p:spPr>
+        <p:txBody>
+          <a:bodyPr wrap="none" rtlCol="0">
+            <a:spAutoFit/>
+          </a:bodyPr>
+          <a:lstStyle/>
+          <a:p>
+            <a:r>
+              <a:rPr lang="es-CL" dirty="0" err="1"/>
+              <a:t>encontarse</a:t>
+            </a:r>
+            <a:endParaRPr lang="es-CL" dirty="0"/>
+          </a:p>
+        </p:txBody>
+      </p:sp>
+      <p:sp>
+        <p:nvSpPr>
+          <p:cNvPr id="9" name="TextBox 8">
+            <a:extLst>
+              <a:ext uri="{FF2B5EF4-FFF2-40B4-BE49-F238E27FC236}">
+                <a16:creationId xmlns:a16="http://schemas.microsoft.com/office/drawing/2014/main" id="{098B9ECD-DEAC-D636-A972-1E85DE3D9F2E}"/>
+              </a:ext>
+            </a:extLst>
+          </p:cNvPr>
+          <p:cNvSpPr txBox="1"/>
+          <p:nvPr/>
+        </p:nvSpPr>
+        <p:spPr>
+          <a:xfrm>
+            <a:off x="1534268" y="4655820"/>
+            <a:ext cx="656911" cy="369332"/>
+          </a:xfrm>
+          <a:prstGeom prst="rect">
+            <a:avLst/>
+          </a:prstGeom>
+          <a:noFill/>
+        </p:spPr>
+        <p:txBody>
+          <a:bodyPr wrap="none" rtlCol="0">
+            <a:spAutoFit/>
+          </a:bodyPr>
+          <a:lstStyle/>
+          <a:p>
+            <a:r>
+              <a:rPr lang="es-CL" dirty="0"/>
+              <a:t>venir</a:t>
+            </a:r>
+          </a:p>
+        </p:txBody>
+      </p:sp>
+      <p:sp>
+        <p:nvSpPr>
+          <p:cNvPr id="10" name="TextBox 9">
+            <a:extLst>
+              <a:ext uri="{FF2B5EF4-FFF2-40B4-BE49-F238E27FC236}">
+                <a16:creationId xmlns:a16="http://schemas.microsoft.com/office/drawing/2014/main" id="{B1299594-464E-4FA4-B329-F5E7BF9CF87B}"/>
+              </a:ext>
+            </a:extLst>
+          </p:cNvPr>
+          <p:cNvSpPr txBox="1"/>
+          <p:nvPr/>
+        </p:nvSpPr>
+        <p:spPr>
+          <a:xfrm>
+            <a:off x="1534268" y="5288280"/>
+            <a:ext cx="482183" cy="369332"/>
+          </a:xfrm>
+          <a:prstGeom prst="rect">
+            <a:avLst/>
+          </a:prstGeom>
+          <a:noFill/>
+        </p:spPr>
+        <p:txBody>
+          <a:bodyPr wrap="none" rtlCol="0">
+            <a:spAutoFit/>
+          </a:bodyPr>
+          <a:lstStyle/>
+          <a:p>
+            <a:r>
+              <a:rPr lang="es-CL" dirty="0"/>
+              <a:t>ver</a:t>
+            </a:r>
+          </a:p>
+        </p:txBody>
+      </p:sp>
+      <p:sp>
+        <p:nvSpPr>
+          <p:cNvPr id="13" name="TextBox 12">
+            <a:extLst>
+              <a:ext uri="{FF2B5EF4-FFF2-40B4-BE49-F238E27FC236}">
+                <a16:creationId xmlns:a16="http://schemas.microsoft.com/office/drawing/2014/main" id="{BBB4048F-D4D7-E4AA-D695-20B437A912FA}"/>
+              </a:ext>
+            </a:extLst>
+          </p:cNvPr>
+          <p:cNvSpPr txBox="1"/>
+          <p:nvPr/>
+        </p:nvSpPr>
+        <p:spPr>
+          <a:xfrm>
+            <a:off x="5326380" y="5288280"/>
+            <a:ext cx="1838965" cy="1015663"/>
+          </a:xfrm>
+          <a:prstGeom prst="rect">
+            <a:avLst/>
+          </a:prstGeom>
+          <a:noFill/>
+        </p:spPr>
+        <p:txBody>
+          <a:bodyPr wrap="none" rtlCol="0">
+            <a:spAutoFit/>
+          </a:bodyPr>
+          <a:lstStyle/>
+          <a:p>
+            <a:r>
+              <a:rPr lang="ko-KR" altLang="es-CL" sz="2000" dirty="0"/>
+              <a:t>영화</a:t>
+            </a:r>
+            <a:r>
+              <a:rPr lang="ko-KR" altLang="es-CL" sz="2000" dirty="0">
+                <a:highlight>
+                  <a:srgbClr val="FFFF00"/>
+                </a:highlight>
+              </a:rPr>
+              <a:t>를</a:t>
+            </a:r>
+            <a:r>
+              <a:rPr lang="ko-KR" altLang="es-CL" sz="2000" dirty="0"/>
+              <a:t> 봐요</a:t>
+            </a:r>
+            <a:endParaRPr lang="es-CL" altLang="ko-KR" sz="2000" dirty="0"/>
+          </a:p>
+          <a:p>
+            <a:r>
+              <a:rPr lang="es-CL" sz="2000" dirty="0" err="1"/>
+              <a:t>King’s</a:t>
+            </a:r>
+            <a:r>
+              <a:rPr lang="es-CL" sz="2000" dirty="0"/>
+              <a:t> </a:t>
+            </a:r>
+            <a:r>
+              <a:rPr lang="es-CL" sz="2000" dirty="0" err="1"/>
+              <a:t>warden</a:t>
+            </a:r>
+            <a:endParaRPr lang="es-CL" sz="2000" dirty="0"/>
+          </a:p>
+          <a:p>
+            <a:r>
+              <a:rPr lang="ko-KR" altLang="es-CL" sz="2000" dirty="0"/>
+              <a:t>왕과 사는 남자</a:t>
+            </a:r>
+            <a:endParaRPr lang="es-CL" sz="2000" dirty="0"/>
+          </a:p>
+        </p:txBody>
+      </p:sp>
     </p:spTree>
   </p:cSld>
   <p:clrMapOvr>
@@ -10527,7 +12576,7 @@
       </p:grpSpPr>
       <p:pic>
         <p:nvPicPr>
-          <p:cNvPr id="2" name="Picture 1" descr="08_79_haedayo.png"/>
+          <p:cNvPr id="2" name="Picture 1" descr="07_79_eoyo.png"/>
           <p:cNvPicPr>
             <a:picLocks noChangeAspect="1"/>
           </p:cNvPicPr>
@@ -10549,6 +12598,629 @@
           </a:prstGeom>
         </p:spPr>
       </p:pic>
+      <p:sp>
+        <p:nvSpPr>
+          <p:cNvPr id="3" name="TextBox 2">
+            <a:extLst>
+              <a:ext uri="{FF2B5EF4-FFF2-40B4-BE49-F238E27FC236}">
+                <a16:creationId xmlns:a16="http://schemas.microsoft.com/office/drawing/2014/main" id="{51D04877-DAE1-39CB-D701-811A2FB536C7}"/>
+              </a:ext>
+            </a:extLst>
+          </p:cNvPr>
+          <p:cNvSpPr txBox="1"/>
+          <p:nvPr/>
+        </p:nvSpPr>
+        <p:spPr>
+          <a:xfrm>
+            <a:off x="1414272" y="2054352"/>
+            <a:ext cx="809837" cy="369332"/>
+          </a:xfrm>
+          <a:prstGeom prst="rect">
+            <a:avLst/>
+          </a:prstGeom>
+          <a:noFill/>
+        </p:spPr>
+        <p:txBody>
+          <a:bodyPr wrap="none" rtlCol="0">
+            <a:spAutoFit/>
+          </a:bodyPr>
+          <a:lstStyle/>
+          <a:p>
+            <a:r>
+              <a:rPr lang="es-CL" dirty="0"/>
+              <a:t>Comer</a:t>
+            </a:r>
+          </a:p>
+        </p:txBody>
+      </p:sp>
+      <p:sp>
+        <p:nvSpPr>
+          <p:cNvPr id="4" name="TextBox 3">
+            <a:extLst>
+              <a:ext uri="{FF2B5EF4-FFF2-40B4-BE49-F238E27FC236}">
+                <a16:creationId xmlns:a16="http://schemas.microsoft.com/office/drawing/2014/main" id="{C71642EE-6B7B-D1F8-33DF-2782EDC3F72E}"/>
+              </a:ext>
+            </a:extLst>
+          </p:cNvPr>
+          <p:cNvSpPr txBox="1"/>
+          <p:nvPr/>
+        </p:nvSpPr>
+        <p:spPr>
+          <a:xfrm>
+            <a:off x="5772912" y="1999488"/>
+            <a:ext cx="1391728" cy="369332"/>
+          </a:xfrm>
+          <a:prstGeom prst="rect">
+            <a:avLst/>
+          </a:prstGeom>
+          <a:noFill/>
+        </p:spPr>
+        <p:txBody>
+          <a:bodyPr wrap="none" rtlCol="0">
+            <a:spAutoFit/>
+          </a:bodyPr>
+          <a:lstStyle/>
+          <a:p>
+            <a:r>
+              <a:rPr lang="ko-KR" altLang="es-CL" dirty="0"/>
+              <a:t>빵</a:t>
+            </a:r>
+            <a:r>
+              <a:rPr lang="ko-KR" altLang="es-CL" dirty="0">
+                <a:highlight>
+                  <a:srgbClr val="FFFF00"/>
+                </a:highlight>
+              </a:rPr>
+              <a:t>을</a:t>
+            </a:r>
+            <a:r>
+              <a:rPr lang="ko-KR" altLang="es-CL" dirty="0"/>
+              <a:t> 먹어요</a:t>
+            </a:r>
+            <a:endParaRPr lang="es-CL" dirty="0"/>
+          </a:p>
+        </p:txBody>
+      </p:sp>
+      <p:sp>
+        <p:nvSpPr>
+          <p:cNvPr id="5" name="TextBox 4">
+            <a:extLst>
+              <a:ext uri="{FF2B5EF4-FFF2-40B4-BE49-F238E27FC236}">
+                <a16:creationId xmlns:a16="http://schemas.microsoft.com/office/drawing/2014/main" id="{C383B281-B91C-F51E-3F04-FE7CE69E23C3}"/>
+              </a:ext>
+            </a:extLst>
+          </p:cNvPr>
+          <p:cNvSpPr txBox="1"/>
+          <p:nvPr/>
+        </p:nvSpPr>
+        <p:spPr>
+          <a:xfrm>
+            <a:off x="1414272" y="2694432"/>
+            <a:ext cx="593432" cy="369332"/>
+          </a:xfrm>
+          <a:prstGeom prst="rect">
+            <a:avLst/>
+          </a:prstGeom>
+          <a:noFill/>
+        </p:spPr>
+        <p:txBody>
+          <a:bodyPr wrap="none" rtlCol="0">
+            <a:spAutoFit/>
+          </a:bodyPr>
+          <a:lstStyle/>
+          <a:p>
+            <a:r>
+              <a:rPr lang="es-CL" dirty="0"/>
+              <a:t>Leer</a:t>
+            </a:r>
+          </a:p>
+        </p:txBody>
+      </p:sp>
+      <p:sp>
+        <p:nvSpPr>
+          <p:cNvPr id="6" name="TextBox 5">
+            <a:extLst>
+              <a:ext uri="{FF2B5EF4-FFF2-40B4-BE49-F238E27FC236}">
+                <a16:creationId xmlns:a16="http://schemas.microsoft.com/office/drawing/2014/main" id="{536B1A46-1781-0170-D775-B3A41C280C33}"/>
+              </a:ext>
+            </a:extLst>
+          </p:cNvPr>
+          <p:cNvSpPr txBox="1"/>
+          <p:nvPr/>
+        </p:nvSpPr>
+        <p:spPr>
+          <a:xfrm>
+            <a:off x="5663184" y="2663952"/>
+            <a:ext cx="1622560" cy="369332"/>
+          </a:xfrm>
+          <a:prstGeom prst="rect">
+            <a:avLst/>
+          </a:prstGeom>
+          <a:noFill/>
+        </p:spPr>
+        <p:txBody>
+          <a:bodyPr wrap="none" rtlCol="0">
+            <a:spAutoFit/>
+          </a:bodyPr>
+          <a:lstStyle/>
+          <a:p>
+            <a:r>
+              <a:rPr lang="ko-KR" altLang="es-CL" dirty="0"/>
+              <a:t>신문</a:t>
+            </a:r>
+            <a:r>
+              <a:rPr lang="ko-KR" altLang="es-CL" dirty="0">
+                <a:highlight>
+                  <a:srgbClr val="FFFF00"/>
+                </a:highlight>
+              </a:rPr>
+              <a:t>을</a:t>
+            </a:r>
+            <a:r>
+              <a:rPr lang="ko-KR" altLang="es-CL" dirty="0"/>
+              <a:t> 읽어요</a:t>
+            </a:r>
+            <a:endParaRPr lang="es-CL" dirty="0"/>
+          </a:p>
+        </p:txBody>
+      </p:sp>
+      <p:sp>
+        <p:nvSpPr>
+          <p:cNvPr id="7" name="TextBox 6">
+            <a:extLst>
+              <a:ext uri="{FF2B5EF4-FFF2-40B4-BE49-F238E27FC236}">
+                <a16:creationId xmlns:a16="http://schemas.microsoft.com/office/drawing/2014/main" id="{120DEE2B-4876-21EA-6743-326DBBD2256C}"/>
+              </a:ext>
+            </a:extLst>
+          </p:cNvPr>
+          <p:cNvSpPr txBox="1"/>
+          <p:nvPr/>
+        </p:nvSpPr>
+        <p:spPr>
+          <a:xfrm>
+            <a:off x="7542995" y="1925288"/>
+            <a:ext cx="1960793" cy="1477328"/>
+          </a:xfrm>
+          <a:prstGeom prst="rect">
+            <a:avLst/>
+          </a:prstGeom>
+          <a:noFill/>
+        </p:spPr>
+        <p:txBody>
+          <a:bodyPr wrap="none" rtlCol="0">
+            <a:spAutoFit/>
+          </a:bodyPr>
+          <a:lstStyle/>
+          <a:p>
+            <a:r>
+              <a:rPr lang="es-CL" dirty="0"/>
+              <a:t>~</a:t>
+            </a:r>
+            <a:r>
+              <a:rPr lang="ko-KR" altLang="es-CL" dirty="0"/>
+              <a:t>세요</a:t>
+            </a:r>
+            <a:endParaRPr lang="es-CL" altLang="ko-KR" dirty="0"/>
+          </a:p>
+          <a:p>
+            <a:r>
+              <a:rPr lang="ko-KR" altLang="es-CL" dirty="0"/>
+              <a:t>밥 먹었어</a:t>
+            </a:r>
+            <a:r>
+              <a:rPr lang="es-CL" altLang="ko-KR" dirty="0"/>
+              <a:t>?</a:t>
+            </a:r>
+          </a:p>
+          <a:p>
+            <a:r>
+              <a:rPr lang="ko-KR" altLang="es-CL" dirty="0"/>
+              <a:t>밥 먹었어요</a:t>
+            </a:r>
+            <a:r>
+              <a:rPr lang="es-CL" altLang="ko-KR" dirty="0"/>
+              <a:t>?</a:t>
+            </a:r>
+          </a:p>
+          <a:p>
+            <a:r>
+              <a:rPr lang="ko-KR" altLang="es-CL" dirty="0"/>
+              <a:t>밥 먹었습니까</a:t>
+            </a:r>
+            <a:r>
+              <a:rPr lang="es-CL" altLang="ko-KR" dirty="0"/>
+              <a:t>?</a:t>
+            </a:r>
+          </a:p>
+          <a:p>
+            <a:r>
+              <a:rPr lang="ko-KR" altLang="es-CL" dirty="0"/>
+              <a:t>진지 드셨습니까</a:t>
+            </a:r>
+            <a:r>
+              <a:rPr lang="es-CL" altLang="ko-KR" dirty="0"/>
+              <a:t>?</a:t>
+            </a:r>
+            <a:endParaRPr lang="es-CL" dirty="0"/>
+          </a:p>
+        </p:txBody>
+      </p:sp>
+      <p:sp>
+        <p:nvSpPr>
+          <p:cNvPr id="8" name="TextBox 7">
+            <a:extLst>
+              <a:ext uri="{FF2B5EF4-FFF2-40B4-BE49-F238E27FC236}">
+                <a16:creationId xmlns:a16="http://schemas.microsoft.com/office/drawing/2014/main" id="{571AC854-237F-C5E5-4177-144F72C20AEB}"/>
+              </a:ext>
+            </a:extLst>
+          </p:cNvPr>
+          <p:cNvSpPr txBox="1"/>
+          <p:nvPr/>
+        </p:nvSpPr>
+        <p:spPr>
+          <a:xfrm>
+            <a:off x="1576876" y="3347752"/>
+            <a:ext cx="765915" cy="369332"/>
+          </a:xfrm>
+          <a:prstGeom prst="rect">
+            <a:avLst/>
+          </a:prstGeom>
+          <a:noFill/>
+        </p:spPr>
+        <p:txBody>
+          <a:bodyPr wrap="none" rtlCol="0">
+            <a:spAutoFit/>
+          </a:bodyPr>
+          <a:lstStyle/>
+          <a:p>
+            <a:r>
+              <a:rPr lang="es-CL" dirty="0"/>
+              <a:t>enviar</a:t>
+            </a:r>
+          </a:p>
+        </p:txBody>
+      </p:sp>
+      <p:sp>
+        <p:nvSpPr>
+          <p:cNvPr id="9" name="TextBox 8">
+            <a:extLst>
+              <a:ext uri="{FF2B5EF4-FFF2-40B4-BE49-F238E27FC236}">
+                <a16:creationId xmlns:a16="http://schemas.microsoft.com/office/drawing/2014/main" id="{F2B64C09-9E40-C1E8-82D6-BBD3F28B8BAE}"/>
+              </a:ext>
+            </a:extLst>
+          </p:cNvPr>
+          <p:cNvSpPr txBox="1"/>
+          <p:nvPr/>
+        </p:nvSpPr>
+        <p:spPr>
+          <a:xfrm>
+            <a:off x="5644835" y="3320534"/>
+            <a:ext cx="1622560" cy="369332"/>
+          </a:xfrm>
+          <a:prstGeom prst="rect">
+            <a:avLst/>
+          </a:prstGeom>
+          <a:noFill/>
+        </p:spPr>
+        <p:txBody>
+          <a:bodyPr wrap="none" rtlCol="0">
+            <a:spAutoFit/>
+          </a:bodyPr>
+          <a:lstStyle/>
+          <a:p>
+            <a:r>
+              <a:rPr lang="ko-KR" altLang="es-CL" dirty="0"/>
+              <a:t>선물</a:t>
+            </a:r>
+            <a:r>
+              <a:rPr lang="ko-KR" altLang="es-CL" dirty="0">
+                <a:highlight>
+                  <a:srgbClr val="FFFF00"/>
+                </a:highlight>
+              </a:rPr>
+              <a:t>을</a:t>
+            </a:r>
+            <a:r>
+              <a:rPr lang="ko-KR" altLang="es-CL" dirty="0"/>
+              <a:t> 보내요</a:t>
+            </a:r>
+            <a:endParaRPr lang="es-CL" dirty="0"/>
+          </a:p>
+        </p:txBody>
+      </p:sp>
+      <p:sp>
+        <p:nvSpPr>
+          <p:cNvPr id="10" name="TextBox 9">
+            <a:extLst>
+              <a:ext uri="{FF2B5EF4-FFF2-40B4-BE49-F238E27FC236}">
+                <a16:creationId xmlns:a16="http://schemas.microsoft.com/office/drawing/2014/main" id="{AC5D283E-C568-C985-C6B0-3C13AE2289C3}"/>
+              </a:ext>
+            </a:extLst>
+          </p:cNvPr>
+          <p:cNvSpPr txBox="1"/>
+          <p:nvPr/>
+        </p:nvSpPr>
+        <p:spPr>
+          <a:xfrm>
+            <a:off x="1466410" y="3995714"/>
+            <a:ext cx="884473" cy="369332"/>
+          </a:xfrm>
+          <a:prstGeom prst="rect">
+            <a:avLst/>
+          </a:prstGeom>
+          <a:noFill/>
+        </p:spPr>
+        <p:txBody>
+          <a:bodyPr wrap="none" rtlCol="0">
+            <a:spAutoFit/>
+          </a:bodyPr>
+          <a:lstStyle/>
+          <a:p>
+            <a:r>
+              <a:rPr lang="es-CL" dirty="0"/>
+              <a:t>pararse</a:t>
+            </a:r>
+          </a:p>
+        </p:txBody>
+      </p:sp>
+      <p:sp>
+        <p:nvSpPr>
+          <p:cNvPr id="11" name="TextBox 10">
+            <a:extLst>
+              <a:ext uri="{FF2B5EF4-FFF2-40B4-BE49-F238E27FC236}">
+                <a16:creationId xmlns:a16="http://schemas.microsoft.com/office/drawing/2014/main" id="{64495904-141F-992C-DB10-A517C74A700C}"/>
+              </a:ext>
+            </a:extLst>
+          </p:cNvPr>
+          <p:cNvSpPr txBox="1"/>
+          <p:nvPr/>
+        </p:nvSpPr>
+        <p:spPr>
+          <a:xfrm>
+            <a:off x="5644835" y="3937278"/>
+            <a:ext cx="1391728" cy="369332"/>
+          </a:xfrm>
+          <a:prstGeom prst="rect">
+            <a:avLst/>
+          </a:prstGeom>
+          <a:noFill/>
+        </p:spPr>
+        <p:txBody>
+          <a:bodyPr wrap="none" rtlCol="0">
+            <a:spAutoFit/>
+          </a:bodyPr>
+          <a:lstStyle/>
+          <a:p>
+            <a:r>
+              <a:rPr lang="ko-KR" altLang="es-CL" dirty="0"/>
+              <a:t>똑바로 서요</a:t>
+            </a:r>
+            <a:endParaRPr lang="es-CL" dirty="0"/>
+          </a:p>
+        </p:txBody>
+      </p:sp>
+      <p:sp>
+        <p:nvSpPr>
+          <p:cNvPr id="12" name="TextBox 11">
+            <a:extLst>
+              <a:ext uri="{FF2B5EF4-FFF2-40B4-BE49-F238E27FC236}">
+                <a16:creationId xmlns:a16="http://schemas.microsoft.com/office/drawing/2014/main" id="{23D4006F-CFBB-4616-ED21-79221A6C65C7}"/>
+              </a:ext>
+            </a:extLst>
+          </p:cNvPr>
+          <p:cNvSpPr txBox="1"/>
+          <p:nvPr/>
+        </p:nvSpPr>
+        <p:spPr>
+          <a:xfrm>
+            <a:off x="1517596" y="4625698"/>
+            <a:ext cx="1048877" cy="369332"/>
+          </a:xfrm>
+          <a:prstGeom prst="rect">
+            <a:avLst/>
+          </a:prstGeom>
+          <a:noFill/>
+        </p:spPr>
+        <p:txBody>
+          <a:bodyPr wrap="none" rtlCol="0">
+            <a:spAutoFit/>
+          </a:bodyPr>
+          <a:lstStyle/>
+          <a:p>
+            <a:r>
+              <a:rPr lang="es-CL" dirty="0"/>
+              <a:t>aprender</a:t>
+            </a:r>
+          </a:p>
+        </p:txBody>
+      </p:sp>
+      <p:sp>
+        <p:nvSpPr>
+          <p:cNvPr id="13" name="TextBox 12">
+            <a:extLst>
+              <a:ext uri="{FF2B5EF4-FFF2-40B4-BE49-F238E27FC236}">
+                <a16:creationId xmlns:a16="http://schemas.microsoft.com/office/drawing/2014/main" id="{099DF572-87CA-6AB8-F411-64E2BB1EF991}"/>
+              </a:ext>
+            </a:extLst>
+          </p:cNvPr>
+          <p:cNvSpPr txBox="1"/>
+          <p:nvPr/>
+        </p:nvSpPr>
+        <p:spPr>
+          <a:xfrm>
+            <a:off x="5644835" y="4625698"/>
+            <a:ext cx="1853392" cy="369332"/>
+          </a:xfrm>
+          <a:prstGeom prst="rect">
+            <a:avLst/>
+          </a:prstGeom>
+          <a:noFill/>
+        </p:spPr>
+        <p:txBody>
+          <a:bodyPr wrap="none" rtlCol="0">
+            <a:spAutoFit/>
+          </a:bodyPr>
+          <a:lstStyle/>
+          <a:p>
+            <a:r>
+              <a:rPr lang="ko-KR" altLang="es-CL" dirty="0"/>
+              <a:t>한국어</a:t>
+            </a:r>
+            <a:r>
+              <a:rPr lang="ko-KR" altLang="es-CL" dirty="0">
+                <a:highlight>
+                  <a:srgbClr val="FFFF00"/>
+                </a:highlight>
+              </a:rPr>
+              <a:t>를</a:t>
+            </a:r>
+            <a:r>
+              <a:rPr lang="ko-KR" altLang="es-CL" dirty="0"/>
+              <a:t> 배워요</a:t>
+            </a:r>
+            <a:endParaRPr lang="es-CL" dirty="0"/>
+          </a:p>
+        </p:txBody>
+      </p:sp>
+      <p:sp>
+        <p:nvSpPr>
+          <p:cNvPr id="14" name="TextBox 13">
+            <a:extLst>
+              <a:ext uri="{FF2B5EF4-FFF2-40B4-BE49-F238E27FC236}">
+                <a16:creationId xmlns:a16="http://schemas.microsoft.com/office/drawing/2014/main" id="{0FF082CA-156F-E781-53E5-55A8C719878F}"/>
+              </a:ext>
+            </a:extLst>
+          </p:cNvPr>
+          <p:cNvSpPr txBox="1"/>
+          <p:nvPr/>
+        </p:nvSpPr>
+        <p:spPr>
+          <a:xfrm>
+            <a:off x="1576876" y="5296996"/>
+            <a:ext cx="739305" cy="369332"/>
+          </a:xfrm>
+          <a:prstGeom prst="rect">
+            <a:avLst/>
+          </a:prstGeom>
+          <a:noFill/>
+        </p:spPr>
+        <p:txBody>
+          <a:bodyPr wrap="none" rtlCol="0">
+            <a:spAutoFit/>
+          </a:bodyPr>
+          <a:lstStyle/>
+          <a:p>
+            <a:r>
+              <a:rPr lang="es-CL" dirty="0"/>
+              <a:t>beber</a:t>
+            </a:r>
+          </a:p>
+        </p:txBody>
+      </p:sp>
+      <p:sp>
+        <p:nvSpPr>
+          <p:cNvPr id="15" name="TextBox 14">
+            <a:extLst>
+              <a:ext uri="{FF2B5EF4-FFF2-40B4-BE49-F238E27FC236}">
+                <a16:creationId xmlns:a16="http://schemas.microsoft.com/office/drawing/2014/main" id="{281A6E6D-FC5B-305A-91DD-CE3235867509}"/>
+              </a:ext>
+            </a:extLst>
+          </p:cNvPr>
+          <p:cNvSpPr txBox="1"/>
+          <p:nvPr/>
+        </p:nvSpPr>
+        <p:spPr>
+          <a:xfrm>
+            <a:off x="5718048" y="5158496"/>
+            <a:ext cx="3444240" cy="646331"/>
+          </a:xfrm>
+          <a:prstGeom prst="rect">
+            <a:avLst/>
+          </a:prstGeom>
+          <a:noFill/>
+        </p:spPr>
+        <p:txBody>
+          <a:bodyPr wrap="square" rtlCol="0">
+            <a:spAutoFit/>
+          </a:bodyPr>
+          <a:lstStyle/>
+          <a:p>
+            <a:r>
+              <a:rPr lang="ko-KR" altLang="es-CL" dirty="0"/>
+              <a:t>맛있다</a:t>
+            </a:r>
+            <a:endParaRPr lang="es-CL" altLang="ko-KR" dirty="0"/>
+          </a:p>
+          <a:p>
+            <a:r>
+              <a:rPr lang="es-CL" dirty="0"/>
+              <a:t>Sabor(haber/estar)</a:t>
+            </a:r>
+          </a:p>
+        </p:txBody>
+      </p:sp>
+      <p:sp>
+        <p:nvSpPr>
+          <p:cNvPr id="16" name="TextBox 15">
+            <a:extLst>
+              <a:ext uri="{FF2B5EF4-FFF2-40B4-BE49-F238E27FC236}">
+                <a16:creationId xmlns:a16="http://schemas.microsoft.com/office/drawing/2014/main" id="{D35890A0-C299-F3CB-5B34-E7B74AF4C039}"/>
+              </a:ext>
+            </a:extLst>
+          </p:cNvPr>
+          <p:cNvSpPr txBox="1"/>
+          <p:nvPr/>
+        </p:nvSpPr>
+        <p:spPr>
+          <a:xfrm>
+            <a:off x="3592323" y="5798107"/>
+            <a:ext cx="3444240" cy="923330"/>
+          </a:xfrm>
+          <a:prstGeom prst="rect">
+            <a:avLst/>
+          </a:prstGeom>
+          <a:noFill/>
+        </p:spPr>
+        <p:txBody>
+          <a:bodyPr wrap="square" rtlCol="0">
+            <a:spAutoFit/>
+          </a:bodyPr>
+          <a:lstStyle/>
+          <a:p>
+            <a:r>
+              <a:rPr lang="ko-KR" altLang="es-CL" dirty="0"/>
+              <a:t>우유</a:t>
+            </a:r>
+            <a:r>
+              <a:rPr lang="ko-KR" altLang="es-CL" dirty="0">
+                <a:highlight>
+                  <a:srgbClr val="FFFF00"/>
+                </a:highlight>
+              </a:rPr>
+              <a:t>를</a:t>
+            </a:r>
+            <a:r>
+              <a:rPr lang="ko-KR" altLang="es-CL" dirty="0"/>
+              <a:t> 마셔요</a:t>
+            </a:r>
+            <a:endParaRPr lang="es-CL" altLang="ko-KR" dirty="0"/>
+          </a:p>
+          <a:p>
+            <a:r>
+              <a:rPr lang="ko-KR" altLang="es-CL" dirty="0"/>
+              <a:t>맥주를 마셔요</a:t>
+            </a:r>
+            <a:endParaRPr lang="es-CL" altLang="ko-KR" dirty="0"/>
+          </a:p>
+          <a:p>
+            <a:r>
+              <a:rPr lang="ko-KR" altLang="es-CL" dirty="0"/>
+              <a:t>이모 여기 맥주 주세요</a:t>
+            </a:r>
+            <a:endParaRPr lang="es-CL" dirty="0"/>
+          </a:p>
+        </p:txBody>
+      </p:sp>
     </p:spTree>
   </p:cSld>
   <p:clrMapOvr>
@@ -10576,7 +13248,7 @@
       </p:grpSpPr>
       <p:pic>
         <p:nvPicPr>
-          <p:cNvPr id="2" name="Picture 1" descr="09_79_convo.png"/>
+          <p:cNvPr id="2" name="Picture 1" descr="08_79_haedayo.png"/>
           <p:cNvPicPr>
             <a:picLocks noChangeAspect="1"/>
           </p:cNvPicPr>
@@ -10598,6 +13270,237 @@
           </a:prstGeom>
         </p:spPr>
       </p:pic>
+      <p:sp>
+        <p:nvSpPr>
+          <p:cNvPr id="3" name="TextBox 2">
+            <a:extLst>
+              <a:ext uri="{FF2B5EF4-FFF2-40B4-BE49-F238E27FC236}">
+                <a16:creationId xmlns:a16="http://schemas.microsoft.com/office/drawing/2014/main" id="{51B6D7E3-E906-6D31-BF12-43366FE62B48}"/>
+              </a:ext>
+            </a:extLst>
+          </p:cNvPr>
+          <p:cNvSpPr txBox="1"/>
+          <p:nvPr/>
+        </p:nvSpPr>
+        <p:spPr>
+          <a:xfrm>
+            <a:off x="982980" y="3429000"/>
+            <a:ext cx="2536272" cy="1200329"/>
+          </a:xfrm>
+          <a:prstGeom prst="rect">
+            <a:avLst/>
+          </a:prstGeom>
+          <a:noFill/>
+        </p:spPr>
+        <p:txBody>
+          <a:bodyPr wrap="none" rtlCol="0">
+            <a:spAutoFit/>
+          </a:bodyPr>
+          <a:lstStyle/>
+          <a:p>
+            <a:r>
+              <a:rPr lang="ko-KR" altLang="es-CL" dirty="0"/>
+              <a:t>공부</a:t>
+            </a:r>
+            <a:r>
+              <a:rPr lang="ko-KR" altLang="es-CL" dirty="0">
+                <a:highlight>
+                  <a:srgbClr val="FFFF00"/>
+                </a:highlight>
+              </a:rPr>
+              <a:t>를</a:t>
+            </a:r>
+            <a:r>
+              <a:rPr lang="ko-KR" altLang="es-CL" dirty="0"/>
+              <a:t> 해요 </a:t>
+            </a:r>
+            <a:r>
+              <a:rPr lang="es-CL" altLang="ko-KR" dirty="0"/>
+              <a:t>= </a:t>
+            </a:r>
+            <a:r>
+              <a:rPr lang="ko-KR" altLang="es-CL" dirty="0"/>
+              <a:t>공부해요</a:t>
+            </a:r>
+            <a:endParaRPr lang="es-CL" altLang="ko-KR" dirty="0"/>
+          </a:p>
+          <a:p>
+            <a:r>
+              <a:rPr lang="ko-KR" altLang="es-CL" dirty="0"/>
+              <a:t>전화</a:t>
+            </a:r>
+            <a:r>
+              <a:rPr lang="ko-KR" altLang="es-CL" dirty="0">
+                <a:highlight>
+                  <a:srgbClr val="FFFF00"/>
+                </a:highlight>
+              </a:rPr>
+              <a:t>를</a:t>
+            </a:r>
+            <a:r>
+              <a:rPr lang="ko-KR" altLang="es-CL" dirty="0"/>
+              <a:t> 해요 </a:t>
+            </a:r>
+            <a:r>
+              <a:rPr lang="es-CL" altLang="ko-KR" dirty="0"/>
+              <a:t>= </a:t>
+            </a:r>
+            <a:r>
+              <a:rPr lang="ko-KR" altLang="es-CL" dirty="0"/>
+              <a:t>전화해요</a:t>
+            </a:r>
+            <a:endParaRPr lang="es-CL" altLang="ko-KR" dirty="0"/>
+          </a:p>
+          <a:p>
+            <a:r>
+              <a:rPr lang="ko-KR" altLang="es-CL" dirty="0"/>
+              <a:t>일</a:t>
+            </a:r>
+            <a:r>
+              <a:rPr lang="ko-KR" altLang="es-CL" dirty="0">
+                <a:highlight>
+                  <a:srgbClr val="FFFF00"/>
+                </a:highlight>
+              </a:rPr>
+              <a:t>을</a:t>
+            </a:r>
+            <a:r>
+              <a:rPr lang="ko-KR" altLang="es-CL" dirty="0"/>
+              <a:t> 해요 </a:t>
+            </a:r>
+            <a:r>
+              <a:rPr lang="es-CL" altLang="ko-KR" dirty="0"/>
+              <a:t>= </a:t>
+            </a:r>
+            <a:r>
+              <a:rPr lang="ko-KR" altLang="es-CL" dirty="0"/>
+              <a:t>일해요</a:t>
+            </a:r>
+            <a:endParaRPr lang="es-CL" altLang="ko-KR" dirty="0"/>
+          </a:p>
+          <a:p>
+            <a:endParaRPr lang="es-CL" dirty="0"/>
+          </a:p>
+        </p:txBody>
+      </p:sp>
+      <p:sp>
+        <p:nvSpPr>
+          <p:cNvPr id="4" name="TextBox 3">
+            <a:extLst>
+              <a:ext uri="{FF2B5EF4-FFF2-40B4-BE49-F238E27FC236}">
+                <a16:creationId xmlns:a16="http://schemas.microsoft.com/office/drawing/2014/main" id="{B032587B-A11B-771C-1B79-CE2405C41094}"/>
+              </a:ext>
+            </a:extLst>
+          </p:cNvPr>
+          <p:cNvSpPr txBox="1"/>
+          <p:nvPr/>
+        </p:nvSpPr>
+        <p:spPr>
+          <a:xfrm>
+            <a:off x="982980" y="4404360"/>
+            <a:ext cx="2536272" cy="1200329"/>
+          </a:xfrm>
+          <a:prstGeom prst="rect">
+            <a:avLst/>
+          </a:prstGeom>
+          <a:noFill/>
+        </p:spPr>
+        <p:txBody>
+          <a:bodyPr wrap="none" rtlCol="0">
+            <a:spAutoFit/>
+          </a:bodyPr>
+          <a:lstStyle/>
+          <a:p>
+            <a:r>
+              <a:rPr lang="ko-KR" altLang="es-CL" dirty="0"/>
+              <a:t>운동</a:t>
+            </a:r>
+            <a:r>
+              <a:rPr lang="ko-KR" altLang="es-CL" dirty="0">
+                <a:highlight>
+                  <a:srgbClr val="FFFF00"/>
+                </a:highlight>
+              </a:rPr>
+              <a:t>을</a:t>
+            </a:r>
+            <a:r>
+              <a:rPr lang="ko-KR" altLang="es-CL" dirty="0"/>
+              <a:t> 해요 </a:t>
+            </a:r>
+            <a:r>
+              <a:rPr lang="es-CL" altLang="ko-KR" dirty="0"/>
+              <a:t>= </a:t>
+            </a:r>
+            <a:r>
+              <a:rPr lang="ko-KR" altLang="es-CL" dirty="0"/>
+              <a:t>운동해요</a:t>
+            </a:r>
+            <a:endParaRPr lang="es-CL" altLang="ko-KR" dirty="0"/>
+          </a:p>
+          <a:p>
+            <a:r>
+              <a:rPr lang="es-CL" dirty="0"/>
+              <a:t>Ejercicio </a:t>
+            </a:r>
+          </a:p>
+          <a:p>
+            <a:r>
+              <a:rPr lang="ko-KR" altLang="es-CL" dirty="0"/>
+              <a:t>청소를 해요 </a:t>
+            </a:r>
+            <a:r>
+              <a:rPr lang="es-CL" altLang="ko-KR" dirty="0"/>
+              <a:t>= </a:t>
+            </a:r>
+            <a:r>
+              <a:rPr lang="ko-KR" altLang="es-CL" dirty="0"/>
+              <a:t>청소해요</a:t>
+            </a:r>
+            <a:endParaRPr lang="es-CL" altLang="ko-KR" dirty="0"/>
+          </a:p>
+          <a:p>
+            <a:r>
+              <a:rPr lang="es-CL" dirty="0"/>
+              <a:t>Limpiar, hacer el aseo</a:t>
+            </a:r>
+          </a:p>
+        </p:txBody>
+      </p:sp>
+      <p:sp>
+        <p:nvSpPr>
+          <p:cNvPr id="5" name="TextBox 4">
+            <a:extLst>
+              <a:ext uri="{FF2B5EF4-FFF2-40B4-BE49-F238E27FC236}">
+                <a16:creationId xmlns:a16="http://schemas.microsoft.com/office/drawing/2014/main" id="{BB1A30E2-52F2-716D-4354-AB61708C1FB2}"/>
+              </a:ext>
+            </a:extLst>
+          </p:cNvPr>
+          <p:cNvSpPr txBox="1"/>
+          <p:nvPr/>
+        </p:nvSpPr>
+        <p:spPr>
+          <a:xfrm>
+            <a:off x="7299960" y="1371600"/>
+            <a:ext cx="2522220" cy="369332"/>
+          </a:xfrm>
+          <a:prstGeom prst="rect">
+            <a:avLst/>
+          </a:prstGeom>
+          <a:noFill/>
+        </p:spPr>
+        <p:txBody>
+          <a:bodyPr wrap="square" rtlCol="0">
+            <a:spAutoFit/>
+          </a:bodyPr>
+          <a:lstStyle/>
+          <a:p>
+            <a:r>
+              <a:rPr lang="es-CL" dirty="0"/>
+              <a:t>Vocal / Consonante</a:t>
+            </a:r>
+          </a:p>
+        </p:txBody>
+      </p:sp>
     </p:spTree>
   </p:cSld>
   <p:clrMapOvr>
@@ -10625,7 +13528,7 @@
       </p:grpSpPr>
       <p:pic>
         <p:nvPicPr>
-          <p:cNvPr id="2" name="Picture 1" descr="10_710_focus.png"/>
+          <p:cNvPr id="2" name="Picture 1" descr="09_79_convo.png"/>
           <p:cNvPicPr>
             <a:picLocks noChangeAspect="1"/>
           </p:cNvPicPr>
@@ -10647,6 +13550,269 @@
           </a:prstGeom>
         </p:spPr>
       </p:pic>
+      <p:sp>
+        <p:nvSpPr>
+          <p:cNvPr id="3" name="TextBox 2">
+            <a:extLst>
+              <a:ext uri="{FF2B5EF4-FFF2-40B4-BE49-F238E27FC236}">
+                <a16:creationId xmlns:a16="http://schemas.microsoft.com/office/drawing/2014/main" id="{41F7DE39-07A8-F943-29CF-CE034A113F79}"/>
+              </a:ext>
+            </a:extLst>
+          </p:cNvPr>
+          <p:cNvSpPr txBox="1"/>
+          <p:nvPr/>
+        </p:nvSpPr>
+        <p:spPr>
+          <a:xfrm>
+            <a:off x="3268980" y="2153920"/>
+            <a:ext cx="1675459" cy="3416320"/>
+          </a:xfrm>
+          <a:prstGeom prst="rect">
+            <a:avLst/>
+          </a:prstGeom>
+          <a:noFill/>
+        </p:spPr>
+        <p:txBody>
+          <a:bodyPr wrap="none" rtlCol="0">
+            <a:spAutoFit/>
+          </a:bodyPr>
+          <a:lstStyle/>
+          <a:p>
+            <a:r>
+              <a:rPr lang="ko-KR" altLang="es-CL" dirty="0"/>
+              <a:t>무엇</a:t>
+            </a:r>
+            <a:endParaRPr lang="es-CL" altLang="ko-KR" dirty="0"/>
+          </a:p>
+          <a:p>
+            <a:r>
+              <a:rPr lang="ko-KR" altLang="es-CL" dirty="0"/>
+              <a:t>뭐 </a:t>
+            </a:r>
+            <a:r>
+              <a:rPr lang="es-CL" altLang="ko-KR" dirty="0"/>
+              <a:t>= que</a:t>
+            </a:r>
+          </a:p>
+          <a:p>
+            <a:r>
+              <a:rPr lang="ko-KR" altLang="es-CL" dirty="0"/>
+              <a:t>무엇을</a:t>
+            </a:r>
+            <a:endParaRPr lang="es-CL" altLang="ko-KR" dirty="0"/>
+          </a:p>
+          <a:p>
+            <a:r>
+              <a:rPr lang="ko-KR" altLang="es-CL" dirty="0"/>
+              <a:t>뭐를</a:t>
+            </a:r>
+            <a:endParaRPr lang="es-CL" altLang="ko-KR" dirty="0"/>
+          </a:p>
+          <a:p>
+            <a:r>
+              <a:rPr lang="ko-KR" altLang="es-CL" dirty="0"/>
+              <a:t>뭘</a:t>
+            </a:r>
+            <a:endParaRPr lang="es-CL" altLang="ko-KR" dirty="0"/>
+          </a:p>
+          <a:p>
+            <a:r>
+              <a:rPr lang="ko-KR" altLang="es-CL" dirty="0"/>
+              <a:t>뭐 해요</a:t>
+            </a:r>
+            <a:r>
+              <a:rPr lang="es-CL" altLang="ko-KR" dirty="0"/>
+              <a:t>?</a:t>
+            </a:r>
+          </a:p>
+          <a:p>
+            <a:r>
+              <a:rPr lang="es-CL" altLang="ko-KR" dirty="0"/>
+              <a:t>Que haces? </a:t>
+            </a:r>
+          </a:p>
+          <a:p>
+            <a:r>
+              <a:rPr lang="ko-KR" altLang="es-CL" dirty="0"/>
+              <a:t>공부해요</a:t>
+            </a:r>
+            <a:endParaRPr lang="es-CL" altLang="ko-KR" dirty="0"/>
+          </a:p>
+          <a:p>
+            <a:r>
+              <a:rPr lang="ko-KR" altLang="es-CL" dirty="0"/>
+              <a:t>일해요</a:t>
+            </a:r>
+            <a:endParaRPr lang="es-CL" altLang="ko-KR" dirty="0"/>
+          </a:p>
+          <a:p>
+            <a:r>
+              <a:rPr lang="ko-KR" altLang="es-CL" dirty="0"/>
+              <a:t>영화봐요</a:t>
+            </a:r>
+            <a:endParaRPr lang="es-CL" altLang="ko-KR" dirty="0"/>
+          </a:p>
+          <a:p>
+            <a:r>
+              <a:rPr lang="ko-KR" altLang="es-CL" dirty="0"/>
+              <a:t>저녁을 먹어요</a:t>
+            </a:r>
+            <a:endParaRPr lang="es-CL" altLang="ko-KR" dirty="0"/>
+          </a:p>
+          <a:p>
+            <a:r>
+              <a:rPr lang="ko-KR" altLang="es-CL" dirty="0"/>
+              <a:t>밥 먹</a:t>
+            </a:r>
+            <a:r>
+              <a:rPr lang="ko-KR" altLang="es-CL" dirty="0">
+                <a:highlight>
+                  <a:srgbClr val="FFFF00"/>
+                </a:highlight>
+              </a:rPr>
+              <a:t>고</a:t>
+            </a:r>
+            <a:r>
+              <a:rPr lang="ko-KR" altLang="es-CL" dirty="0"/>
+              <a:t> 있어요</a:t>
+            </a:r>
+            <a:endParaRPr lang="es-CL" altLang="ko-KR" dirty="0"/>
+          </a:p>
+        </p:txBody>
+      </p:sp>
+      <p:sp>
+        <p:nvSpPr>
+          <p:cNvPr id="4" name="TextBox 3">
+            <a:extLst>
+              <a:ext uri="{FF2B5EF4-FFF2-40B4-BE49-F238E27FC236}">
+                <a16:creationId xmlns:a16="http://schemas.microsoft.com/office/drawing/2014/main" id="{43BFDC53-81AF-8FA8-5ED2-1BFCA0CE1756}"/>
+              </a:ext>
+            </a:extLst>
+          </p:cNvPr>
+          <p:cNvSpPr txBox="1"/>
+          <p:nvPr/>
+        </p:nvSpPr>
+        <p:spPr>
+          <a:xfrm>
+            <a:off x="5142854" y="2514600"/>
+            <a:ext cx="1906291" cy="2308324"/>
+          </a:xfrm>
+          <a:prstGeom prst="rect">
+            <a:avLst/>
+          </a:prstGeom>
+          <a:noFill/>
+        </p:spPr>
+        <p:txBody>
+          <a:bodyPr wrap="none" rtlCol="0">
+            <a:spAutoFit/>
+          </a:bodyPr>
+          <a:lstStyle/>
+          <a:p>
+            <a:r>
+              <a:rPr lang="es-CL" altLang="ko-KR" dirty="0">
+                <a:highlight>
+                  <a:srgbClr val="FFFF00"/>
+                </a:highlight>
+              </a:rPr>
+              <a:t>~</a:t>
+            </a:r>
+            <a:r>
+              <a:rPr lang="ko-KR" altLang="es-CL" dirty="0">
+                <a:highlight>
+                  <a:srgbClr val="FFFF00"/>
+                </a:highlight>
+              </a:rPr>
+              <a:t>고 있어요</a:t>
+            </a:r>
+            <a:endParaRPr lang="es-CL" altLang="ko-KR" dirty="0">
+              <a:highlight>
+                <a:srgbClr val="FFFF00"/>
+              </a:highlight>
+            </a:endParaRPr>
+          </a:p>
+          <a:p>
+            <a:r>
+              <a:rPr lang="es-CL" dirty="0" err="1"/>
+              <a:t>Ing</a:t>
+            </a:r>
+            <a:r>
+              <a:rPr lang="es-CL" dirty="0"/>
+              <a:t>/gerundio</a:t>
+            </a:r>
+          </a:p>
+          <a:p>
+            <a:r>
+              <a:rPr lang="es-CL" dirty="0"/>
+              <a:t>Presente continuo</a:t>
+            </a:r>
+          </a:p>
+          <a:p>
+            <a:r>
+              <a:rPr lang="es-CL" dirty="0" err="1"/>
+              <a:t>Iendo</a:t>
+            </a:r>
+            <a:r>
+              <a:rPr lang="es-CL" dirty="0"/>
+              <a:t>/ando</a:t>
+            </a:r>
+          </a:p>
+          <a:p>
+            <a:r>
+              <a:rPr lang="ko-KR" altLang="es-CL" dirty="0"/>
+              <a:t>책을 읽</a:t>
+            </a:r>
+            <a:r>
+              <a:rPr lang="ko-KR" altLang="es-CL" dirty="0">
+                <a:highlight>
+                  <a:srgbClr val="FFFF00"/>
+                </a:highlight>
+              </a:rPr>
+              <a:t>고</a:t>
+            </a:r>
+            <a:r>
+              <a:rPr lang="ko-KR" altLang="es-CL" dirty="0"/>
+              <a:t> </a:t>
+            </a:r>
+            <a:r>
+              <a:rPr lang="ko-KR" altLang="es-CL" dirty="0">
+                <a:highlight>
+                  <a:srgbClr val="FFFF00"/>
+                </a:highlight>
+              </a:rPr>
+              <a:t>있어요</a:t>
+            </a:r>
+            <a:endParaRPr lang="es-CL" altLang="ko-KR" dirty="0">
+              <a:highlight>
+                <a:srgbClr val="FFFF00"/>
+              </a:highlight>
+            </a:endParaRPr>
+          </a:p>
+          <a:p>
+            <a:r>
+              <a:rPr lang="es-CL" dirty="0"/>
+              <a:t>Leyendo un libro</a:t>
+            </a:r>
+          </a:p>
+          <a:p>
+            <a:r>
+              <a:rPr lang="ko-KR" altLang="es-CL" dirty="0"/>
+              <a:t>뭐예요</a:t>
+            </a:r>
+            <a:r>
+              <a:rPr lang="es-CL" altLang="ko-KR" dirty="0"/>
+              <a:t>?</a:t>
+            </a:r>
+            <a:br>
+              <a:rPr lang="es-CL" altLang="ko-KR" dirty="0"/>
+            </a:br>
+            <a:r>
+              <a:rPr lang="es-CL" altLang="ko-KR" dirty="0"/>
+              <a:t>Que es?</a:t>
+            </a:r>
+            <a:endParaRPr lang="es-CL" dirty="0"/>
+          </a:p>
+        </p:txBody>
+      </p:sp>
     </p:spTree>
   </p:cSld>
   <p:clrMapOvr>
@@ -10899,7 +14065,13 @@
       </p:grpSpPr>
       <p:pic>
         <p:nvPicPr>
-          <p:cNvPr id="2" name="Picture 1" descr="11_710_ej.png"/>
+          <p:cNvPr id="3" name="Picture 2">
+            <a:extLst>
+              <a:ext uri="{FF2B5EF4-FFF2-40B4-BE49-F238E27FC236}">
+                <a16:creationId xmlns:a16="http://schemas.microsoft.com/office/drawing/2014/main" id="{876CC7C2-7A2D-25A8-AF2D-FB44F01899B6}"/>
+              </a:ext>
+            </a:extLst>
+          </p:cNvPr>
           <p:cNvPicPr>
             <a:picLocks noChangeAspect="1"/>
           </p:cNvPicPr>
@@ -10914,14 +14086,384 @@
         <p:spPr>
           <a:xfrm>
             <a:off x="0" y="0"/>
-            <a:ext cx="12192000" cy="6858000"/>
+            <a:ext cx="12192000" cy="5745556"/>
           </a:xfrm>
           <a:prstGeom prst="rect">
             <a:avLst/>
           </a:prstGeom>
         </p:spPr>
       </p:pic>
+      <p:sp>
+        <p:nvSpPr>
+          <p:cNvPr id="4" name="TextBox 3">
+            <a:extLst>
+              <a:ext uri="{FF2B5EF4-FFF2-40B4-BE49-F238E27FC236}">
+                <a16:creationId xmlns:a16="http://schemas.microsoft.com/office/drawing/2014/main" id="{687C423E-1ED9-85B2-7ECC-75C0E01619DC}"/>
+              </a:ext>
+            </a:extLst>
+          </p:cNvPr>
+          <p:cNvSpPr txBox="1"/>
+          <p:nvPr/>
+        </p:nvSpPr>
+        <p:spPr>
+          <a:xfrm>
+            <a:off x="472102" y="2537498"/>
+            <a:ext cx="595035" cy="369332"/>
+          </a:xfrm>
+          <a:prstGeom prst="rect">
+            <a:avLst/>
+          </a:prstGeom>
+          <a:noFill/>
+        </p:spPr>
+        <p:txBody>
+          <a:bodyPr wrap="none" rtlCol="0">
+            <a:spAutoFit/>
+          </a:bodyPr>
+          <a:lstStyle/>
+          <a:p>
+            <a:r>
+              <a:rPr lang="es-CL" dirty="0"/>
+              <a:t>OSO</a:t>
+            </a:r>
+          </a:p>
+        </p:txBody>
+      </p:sp>
+      <p:sp>
+        <p:nvSpPr>
+          <p:cNvPr id="5" name="TextBox 4">
+            <a:extLst>
+              <a:ext uri="{FF2B5EF4-FFF2-40B4-BE49-F238E27FC236}">
+                <a16:creationId xmlns:a16="http://schemas.microsoft.com/office/drawing/2014/main" id="{52AD11C3-EEEE-840A-68D5-DC2EEE9F1429}"/>
+              </a:ext>
+            </a:extLst>
+          </p:cNvPr>
+          <p:cNvSpPr txBox="1"/>
+          <p:nvPr/>
+        </p:nvSpPr>
+        <p:spPr>
+          <a:xfrm>
+            <a:off x="1067137" y="2537498"/>
+            <a:ext cx="2576539" cy="369332"/>
+          </a:xfrm>
+          <a:prstGeom prst="rect">
+            <a:avLst/>
+          </a:prstGeom>
+          <a:noFill/>
+        </p:spPr>
+        <p:txBody>
+          <a:bodyPr wrap="none" rtlCol="0">
+            <a:spAutoFit/>
+          </a:bodyPr>
+          <a:lstStyle/>
+          <a:p>
+            <a:r>
+              <a:rPr lang="es-CL" dirty="0"/>
+              <a:t>Tres (conteo animales) PS</a:t>
+            </a:r>
+          </a:p>
+        </p:txBody>
+      </p:sp>
+      <p:sp>
+        <p:nvSpPr>
+          <p:cNvPr id="6" name="TextBox 5">
+            <a:extLst>
+              <a:ext uri="{FF2B5EF4-FFF2-40B4-BE49-F238E27FC236}">
+                <a16:creationId xmlns:a16="http://schemas.microsoft.com/office/drawing/2014/main" id="{0888E2ED-C60D-7ADC-B4D8-1319E3AF4A27}"/>
+              </a:ext>
+            </a:extLst>
+          </p:cNvPr>
+          <p:cNvSpPr txBox="1"/>
+          <p:nvPr/>
+        </p:nvSpPr>
+        <p:spPr>
+          <a:xfrm>
+            <a:off x="3726517" y="2499398"/>
+            <a:ext cx="2546338" cy="369332"/>
+          </a:xfrm>
+          <a:prstGeom prst="rect">
+            <a:avLst/>
+          </a:prstGeom>
+          <a:noFill/>
+        </p:spPr>
+        <p:txBody>
+          <a:bodyPr wrap="none" rtlCol="0">
+            <a:spAutoFit/>
+          </a:bodyPr>
+          <a:lstStyle/>
+          <a:p>
+            <a:r>
+              <a:rPr lang="es-CL" dirty="0"/>
+              <a:t>Uno Casa Lugar  esta/hay</a:t>
+            </a:r>
+          </a:p>
+        </p:txBody>
+      </p:sp>
+      <p:sp>
+        <p:nvSpPr>
+          <p:cNvPr id="7" name="TextBox 6">
+            <a:extLst>
+              <a:ext uri="{FF2B5EF4-FFF2-40B4-BE49-F238E27FC236}">
+                <a16:creationId xmlns:a16="http://schemas.microsoft.com/office/drawing/2014/main" id="{B4E53106-95DC-4074-CB44-681D87A9FA28}"/>
+              </a:ext>
+            </a:extLst>
+          </p:cNvPr>
+          <p:cNvSpPr txBox="1"/>
+          <p:nvPr/>
+        </p:nvSpPr>
+        <p:spPr>
+          <a:xfrm>
+            <a:off x="6713220" y="2537498"/>
+            <a:ext cx="4134337" cy="369332"/>
+          </a:xfrm>
+          <a:prstGeom prst="rect">
+            <a:avLst/>
+          </a:prstGeom>
+          <a:noFill/>
+        </p:spPr>
+        <p:txBody>
+          <a:bodyPr wrap="none" rtlCol="0">
+            <a:spAutoFit/>
+          </a:bodyPr>
+          <a:lstStyle/>
+          <a:p>
+            <a:r>
+              <a:rPr lang="es-CL" dirty="0"/>
+              <a:t>Papa oso      mama oso                  bebe oso</a:t>
+            </a:r>
+          </a:p>
+        </p:txBody>
+      </p:sp>
+      <p:sp>
+        <p:nvSpPr>
+          <p:cNvPr id="8" name="TextBox 7">
+            <a:extLst>
+              <a:ext uri="{FF2B5EF4-FFF2-40B4-BE49-F238E27FC236}">
+                <a16:creationId xmlns:a16="http://schemas.microsoft.com/office/drawing/2014/main" id="{FA34930B-AA5E-9F9A-5B20-55BEABC267D9}"/>
+              </a:ext>
+            </a:extLst>
+          </p:cNvPr>
+          <p:cNvSpPr txBox="1"/>
+          <p:nvPr/>
+        </p:nvSpPr>
+        <p:spPr>
+          <a:xfrm>
+            <a:off x="769619" y="4168178"/>
+            <a:ext cx="9942274" cy="369332"/>
+          </a:xfrm>
+          <a:prstGeom prst="rect">
+            <a:avLst/>
+          </a:prstGeom>
+          <a:noFill/>
+        </p:spPr>
+        <p:txBody>
+          <a:bodyPr wrap="none" rtlCol="0">
+            <a:spAutoFit/>
+          </a:bodyPr>
+          <a:lstStyle/>
+          <a:p>
+            <a:r>
+              <a:rPr lang="es-CL" dirty="0"/>
+              <a:t>Papa oso (P/T)                                    Gordo                                              mama oso (P/T)                        delgada</a:t>
+            </a:r>
+          </a:p>
+        </p:txBody>
+      </p:sp>
+      <p:sp>
+        <p:nvSpPr>
+          <p:cNvPr id="9" name="TextBox 8">
+            <a:extLst>
+              <a:ext uri="{FF2B5EF4-FFF2-40B4-BE49-F238E27FC236}">
+                <a16:creationId xmlns:a16="http://schemas.microsoft.com/office/drawing/2014/main" id="{75C28AAC-D49C-FDEF-D571-130087C1540F}"/>
+              </a:ext>
+            </a:extLst>
+          </p:cNvPr>
+          <p:cNvSpPr txBox="1"/>
+          <p:nvPr/>
+        </p:nvSpPr>
+        <p:spPr>
+          <a:xfrm>
+            <a:off x="2618521" y="287011"/>
+            <a:ext cx="1653017" cy="1200329"/>
+          </a:xfrm>
+          <a:prstGeom prst="rect">
+            <a:avLst/>
+          </a:prstGeom>
+          <a:noFill/>
+        </p:spPr>
+        <p:txBody>
+          <a:bodyPr wrap="none" rtlCol="0">
+            <a:spAutoFit/>
+          </a:bodyPr>
+          <a:lstStyle/>
+          <a:p>
+            <a:r>
+              <a:rPr lang="ko-KR" altLang="es-CL" dirty="0"/>
+              <a:t>뚱뚱하다</a:t>
+            </a:r>
+            <a:endParaRPr lang="es-CL" altLang="ko-KR" dirty="0"/>
+          </a:p>
+          <a:p>
+            <a:r>
+              <a:rPr lang="ko-KR" altLang="es-CL" dirty="0"/>
+              <a:t>뚱뚱해요</a:t>
+            </a:r>
+            <a:endParaRPr lang="es-CL" altLang="ko-KR" dirty="0"/>
+          </a:p>
+          <a:p>
+            <a:r>
+              <a:rPr lang="ko-KR" altLang="es-CL" dirty="0"/>
+              <a:t>뚱뚱해</a:t>
+            </a:r>
+            <a:endParaRPr lang="es-CL" altLang="ko-KR" dirty="0"/>
+          </a:p>
+          <a:p>
+            <a:r>
+              <a:rPr lang="ko-KR" altLang="es-CL" dirty="0"/>
+              <a:t>뚱뚱을 해요</a:t>
+            </a:r>
+            <a:r>
+              <a:rPr lang="es-CL" altLang="ko-KR" dirty="0"/>
+              <a:t>(X)</a:t>
+            </a:r>
+            <a:endParaRPr lang="es-CL" dirty="0"/>
+          </a:p>
+        </p:txBody>
+      </p:sp>
+      <p:sp>
+        <p:nvSpPr>
+          <p:cNvPr id="10" name="TextBox 9">
+            <a:extLst>
+              <a:ext uri="{FF2B5EF4-FFF2-40B4-BE49-F238E27FC236}">
+                <a16:creationId xmlns:a16="http://schemas.microsoft.com/office/drawing/2014/main" id="{621DEF50-A578-0B3F-8A2D-EF90EC7EB478}"/>
+              </a:ext>
+            </a:extLst>
+          </p:cNvPr>
+          <p:cNvSpPr txBox="1"/>
+          <p:nvPr/>
+        </p:nvSpPr>
+        <p:spPr>
+          <a:xfrm>
+            <a:off x="960582" y="5957455"/>
+            <a:ext cx="9883796" cy="369332"/>
+          </a:xfrm>
+          <a:prstGeom prst="rect">
+            <a:avLst/>
+          </a:prstGeom>
+          <a:noFill/>
+        </p:spPr>
+        <p:txBody>
+          <a:bodyPr wrap="none" rtlCol="0">
+            <a:spAutoFit/>
+          </a:bodyPr>
+          <a:lstStyle/>
+          <a:p>
+            <a:r>
+              <a:rPr lang="es-CL" dirty="0"/>
+              <a:t>Bebe oso  (P/T)                        mucho/muy  tierno                              sonido de subirse hombros   bien hace</a:t>
+            </a:r>
+          </a:p>
+        </p:txBody>
+      </p:sp>
+      <p:sp>
+        <p:nvSpPr>
+          <p:cNvPr id="12" name="TextBox 11">
+            <a:extLst>
+              <a:ext uri="{FF2B5EF4-FFF2-40B4-BE49-F238E27FC236}">
+                <a16:creationId xmlns:a16="http://schemas.microsoft.com/office/drawing/2014/main" id="{06618027-7A29-E553-425F-45C3BD9ED7C2}"/>
+              </a:ext>
+            </a:extLst>
+          </p:cNvPr>
+          <p:cNvSpPr txBox="1"/>
+          <p:nvPr/>
+        </p:nvSpPr>
+        <p:spPr>
+          <a:xfrm>
+            <a:off x="7176470" y="5745556"/>
+            <a:ext cx="1107996" cy="369332"/>
+          </a:xfrm>
+          <a:prstGeom prst="rect">
+            <a:avLst/>
+          </a:prstGeom>
+          <a:noFill/>
+        </p:spPr>
+        <p:txBody>
+          <a:bodyPr wrap="none" rtlCol="0">
+            <a:spAutoFit/>
+          </a:bodyPr>
+          <a:lstStyle/>
+          <a:p>
+            <a:r>
+              <a:rPr lang="ko-KR" altLang="es-CL" dirty="0"/>
+              <a:t>으쓱으쓱</a:t>
+            </a:r>
+            <a:endParaRPr lang="es-CL" dirty="0"/>
+          </a:p>
+        </p:txBody>
+      </p:sp>
+      <p:sp>
+        <p:nvSpPr>
+          <p:cNvPr id="13" name="TextBox 12">
+            <a:extLst>
+              <a:ext uri="{FF2B5EF4-FFF2-40B4-BE49-F238E27FC236}">
+                <a16:creationId xmlns:a16="http://schemas.microsoft.com/office/drawing/2014/main" id="{51B6F78E-A02C-0661-6579-626D7BF55BC1}"/>
+              </a:ext>
+            </a:extLst>
+          </p:cNvPr>
+          <p:cNvSpPr txBox="1"/>
+          <p:nvPr/>
+        </p:nvSpPr>
+        <p:spPr>
+          <a:xfrm>
+            <a:off x="8021770" y="0"/>
+            <a:ext cx="3103418" cy="1754326"/>
+          </a:xfrm>
+          <a:prstGeom prst="rect">
+            <a:avLst/>
+          </a:prstGeom>
+          <a:noFill/>
+        </p:spPr>
+        <p:txBody>
+          <a:bodyPr wrap="square" rtlCol="0">
+            <a:spAutoFit/>
+          </a:bodyPr>
+          <a:lstStyle/>
+          <a:p>
+            <a:r>
+              <a:rPr lang="ko-KR" altLang="es-CL" sz="3600" dirty="0"/>
+              <a:t>의리 </a:t>
+            </a:r>
+            <a:r>
+              <a:rPr lang="es-CL" altLang="ko-KR" sz="3600" dirty="0"/>
+              <a:t>= </a:t>
+            </a:r>
+            <a:r>
+              <a:rPr lang="es-CL" altLang="ko-KR" sz="3600" dirty="0" err="1"/>
+              <a:t>Leatad</a:t>
+            </a:r>
+            <a:endParaRPr lang="es-CL" altLang="ko-KR" sz="3600" dirty="0"/>
+          </a:p>
+          <a:p>
+            <a:r>
+              <a:rPr lang="ko-KR" altLang="es-CL" sz="3600" dirty="0"/>
+              <a:t>사자성어</a:t>
+            </a:r>
+            <a:endParaRPr lang="es-CL" altLang="ko-KR" sz="3600" dirty="0"/>
+          </a:p>
+          <a:p>
+            <a:r>
+              <a:rPr lang="ko-KR" altLang="es-CL" sz="3600" dirty="0"/>
+              <a:t>폼생폼사</a:t>
+            </a:r>
+            <a:endParaRPr lang="es-CL" sz="3600" dirty="0"/>
+          </a:p>
+        </p:txBody>
+      </p:sp>
     </p:spTree>
+    <p:extLst>
+      <p:ext uri="{BB962C8B-B14F-4D97-AF65-F5344CB8AC3E}">
+        <p14:creationId xmlns:p14="http://schemas.microsoft.com/office/powerpoint/2010/main" val="648992347"/>
+      </p:ext>
+    </p:extLst>
   </p:cSld>
   <p:clrMapOvr>
     <a:masterClrMapping/>
@@ -10948,7 +14490,7 @@
       </p:grpSpPr>
       <p:pic>
         <p:nvPicPr>
-          <p:cNvPr id="2" name="Picture 1" descr="12_710_convo.png"/>
+          <p:cNvPr id="2" name="Picture 1" descr="10_710_focus.png"/>
           <p:cNvPicPr>
             <a:picLocks noChangeAspect="1"/>
           </p:cNvPicPr>
@@ -10979,6 +14521,104 @@
 </file>
 
 <file path=ppt/slides/slide32.xml><?xml version="1.0" encoding="utf-8"?>
+<p:sld xmlns:a="http://schemas.openxmlformats.org/drawingml/2006/main" xmlns:r="http://schemas.openxmlformats.org/officeDocument/2006/relationships" xmlns:p="http://schemas.openxmlformats.org/presentationml/2006/main">
+  <p:cSld>
+    <p:spTree>
+      <p:nvGrpSpPr>
+        <p:cNvPr id="1" name=""/>
+        <p:cNvGrpSpPr/>
+        <p:nvPr/>
+      </p:nvGrpSpPr>
+      <p:grpSpPr>
+        <a:xfrm>
+          <a:off x="0" y="0"/>
+          <a:ext cx="0" cy="0"/>
+          <a:chOff x="0" y="0"/>
+          <a:chExt cx="0" cy="0"/>
+        </a:xfrm>
+      </p:grpSpPr>
+      <p:pic>
+        <p:nvPicPr>
+          <p:cNvPr id="2" name="Picture 1" descr="11_710_ej.png"/>
+          <p:cNvPicPr>
+            <a:picLocks noChangeAspect="1"/>
+          </p:cNvPicPr>
+          <p:nvPr/>
+        </p:nvPicPr>
+        <p:blipFill>
+          <a:blip r:embed="rId2"/>
+          <a:stretch>
+            <a:fillRect/>
+          </a:stretch>
+        </p:blipFill>
+        <p:spPr>
+          <a:xfrm>
+            <a:off x="0" y="0"/>
+            <a:ext cx="12192000" cy="6858000"/>
+          </a:xfrm>
+          <a:prstGeom prst="rect">
+            <a:avLst/>
+          </a:prstGeom>
+        </p:spPr>
+      </p:pic>
+    </p:spTree>
+  </p:cSld>
+  <p:clrMapOvr>
+    <a:masterClrMapping/>
+  </p:clrMapOvr>
+</p:sld>
+</file>
+
+<file path=ppt/slides/slide33.xml><?xml version="1.0" encoding="utf-8"?>
+<p:sld xmlns:a="http://schemas.openxmlformats.org/drawingml/2006/main" xmlns:r="http://schemas.openxmlformats.org/officeDocument/2006/relationships" xmlns:p="http://schemas.openxmlformats.org/presentationml/2006/main">
+  <p:cSld>
+    <p:spTree>
+      <p:nvGrpSpPr>
+        <p:cNvPr id="1" name=""/>
+        <p:cNvGrpSpPr/>
+        <p:nvPr/>
+      </p:nvGrpSpPr>
+      <p:grpSpPr>
+        <a:xfrm>
+          <a:off x="0" y="0"/>
+          <a:ext cx="0" cy="0"/>
+          <a:chOff x="0" y="0"/>
+          <a:chExt cx="0" cy="0"/>
+        </a:xfrm>
+      </p:grpSpPr>
+      <p:pic>
+        <p:nvPicPr>
+          <p:cNvPr id="2" name="Picture 1" descr="12_710_convo.png"/>
+          <p:cNvPicPr>
+            <a:picLocks noChangeAspect="1"/>
+          </p:cNvPicPr>
+          <p:nvPr/>
+        </p:nvPicPr>
+        <p:blipFill>
+          <a:blip r:embed="rId2"/>
+          <a:stretch>
+            <a:fillRect/>
+          </a:stretch>
+        </p:blipFill>
+        <p:spPr>
+          <a:xfrm>
+            <a:off x="0" y="0"/>
+            <a:ext cx="12192000" cy="6858000"/>
+          </a:xfrm>
+          <a:prstGeom prst="rect">
+            <a:avLst/>
+          </a:prstGeom>
+        </p:spPr>
+      </p:pic>
+    </p:spTree>
+  </p:cSld>
+  <p:clrMapOvr>
+    <a:masterClrMapping/>
+  </p:clrMapOvr>
+</p:sld>
+</file>
+
+<file path=ppt/slides/slide34.xml><?xml version="1.0" encoding="utf-8"?>
 <p:sld xmlns:a="http://schemas.openxmlformats.org/drawingml/2006/main" xmlns:r="http://schemas.openxmlformats.org/officeDocument/2006/relationships" xmlns:p="http://schemas.openxmlformats.org/presentationml/2006/main">
   <p:cSld name="Slide 11">
     <p:bg>
@@ -11380,7 +15020,7 @@
 </p:sld>
 </file>
 
-<file path=ppt/slides/slide33.xml><?xml version="1.0" encoding="utf-8"?>
+<file path=ppt/slides/slide35.xml><?xml version="1.0" encoding="utf-8"?>
 <p:sld xmlns:a="http://schemas.openxmlformats.org/drawingml/2006/main" xmlns:r="http://schemas.openxmlformats.org/officeDocument/2006/relationships" xmlns:p="http://schemas.openxmlformats.org/presentationml/2006/main">
   <p:cSld>
     <p:spTree>
@@ -11440,7 +15080,7 @@
 </p:sld>
 </file>
 
-<file path=ppt/slides/slide34.xml><?xml version="1.0" encoding="utf-8"?>
+<file path=ppt/slides/slide36.xml><?xml version="1.0" encoding="utf-8"?>
 <p:sld xmlns:a="http://schemas.openxmlformats.org/drawingml/2006/main" xmlns:r="http://schemas.openxmlformats.org/officeDocument/2006/relationships" xmlns:p="http://schemas.openxmlformats.org/presentationml/2006/main">
   <p:cSld name="Slide 12">
     <p:bg>
